--- a/Capstone_Research_Paper_Answer_Bot.pptx
+++ b/Capstone_Research_Paper_Answer_Bot.pptx
@@ -21,6 +21,10 @@
     <p:sldId id="269" r:id="rId15"/>
     <p:sldId id="270" r:id="rId16"/>
     <p:sldId id="271" r:id="rId17"/>
+    <p:sldId id="273" r:id="rId24"/>
+    <p:sldId id="274" r:id="rId25"/>
+    <p:sldId id="275" r:id="rId26"/>
+    <p:sldId id="276" r:id="rId27"/>
     <p:sldId id="272" r:id="rId18"/>
   </p:sldIdLst>
   <p:notesMasterIdLst>
@@ -2318,6 +2322,10 @@
           </a:solidFill>
           <a:ln/>
         </p:spPr>
+        <p:txBody>
+          <a:bodyPr/>
+          <a:p/>
+        </p:txBody>
       </p:sp>
       <p:sp>
         <p:nvSpPr>
@@ -2340,6 +2348,10 @@
           </a:solidFill>
           <a:ln/>
         </p:spPr>
+        <p:txBody>
+          <a:bodyPr/>
+          <a:p/>
+        </p:txBody>
       </p:sp>
       <p:sp>
         <p:nvSpPr>
@@ -2360,6 +2372,10 @@
           </a:solidFill>
           <a:ln/>
         </p:spPr>
+        <p:txBody>
+          <a:bodyPr/>
+          <a:p/>
+        </p:txBody>
       </p:sp>
       <p:pic>
         <p:nvPicPr>
@@ -2588,7 +2604,7 @@
                 <a:ea typeface="Calibri" pitchFamily="34" charset="-122"/>
                 <a:cs typeface="Calibri" pitchFamily="34" charset="-120"/>
               </a:rPr>
-              <a:t>Presented by:  &lt;Your Name&gt;</a:t>
+              <a:t>Presented by:  Jineesh T S</a:t>
             </a:r>
             <a:endParaRPr lang="en-US" sz="1400" dirty="0"/>
           </a:p>
@@ -2645,6 +2661,10 @@
           </a:solidFill>
           <a:ln/>
         </p:spPr>
+        <p:txBody>
+          <a:bodyPr/>
+          <a:p/>
+        </p:txBody>
       </p:sp>
       <p:sp>
         <p:nvSpPr>
@@ -2667,6 +2687,10 @@
           </a:solidFill>
           <a:ln/>
         </p:spPr>
+        <p:txBody>
+          <a:bodyPr/>
+          <a:p/>
+        </p:txBody>
       </p:sp>
       <p:sp>
         <p:nvSpPr>
@@ -2875,6 +2899,10 @@
           </a:solidFill>
           <a:ln/>
         </p:spPr>
+        <p:txBody>
+          <a:bodyPr/>
+          <a:p/>
+        </p:txBody>
       </p:sp>
       <p:pic>
         <p:nvPicPr>
@@ -2972,6 +3000,10 @@
             </a:outerShdw>
           </a:effectLst>
         </p:spPr>
+        <p:txBody>
+          <a:bodyPr/>
+          <a:p/>
+        </p:txBody>
       </p:sp>
       <p:sp>
         <p:nvSpPr>
@@ -2992,6 +3024,10 @@
           </a:solidFill>
           <a:ln/>
         </p:spPr>
+        <p:txBody>
+          <a:bodyPr/>
+          <a:p/>
+        </p:txBody>
       </p:sp>
       <p:pic>
         <p:nvPicPr>
@@ -3180,6 +3216,10 @@
             </a:outerShdw>
           </a:effectLst>
         </p:spPr>
+        <p:txBody>
+          <a:bodyPr/>
+          <a:p/>
+        </p:txBody>
       </p:sp>
       <p:sp>
         <p:nvSpPr>
@@ -3200,6 +3240,10 @@
           </a:solidFill>
           <a:ln/>
         </p:spPr>
+        <p:txBody>
+          <a:bodyPr/>
+          <a:p/>
+        </p:txBody>
       </p:sp>
       <p:pic>
         <p:nvPicPr>
@@ -3425,6 +3469,10 @@
           </a:solidFill>
           <a:ln/>
         </p:spPr>
+        <p:txBody>
+          <a:bodyPr/>
+          <a:p/>
+        </p:txBody>
       </p:sp>
       <p:pic>
         <p:nvPicPr>
@@ -3561,6 +3609,10 @@
             </a:outerShdw>
           </a:effectLst>
         </p:spPr>
+        <p:txBody>
+          <a:bodyPr/>
+          <a:p/>
+        </p:txBody>
       </p:sp>
       <p:sp>
         <p:nvSpPr>
@@ -3663,6 +3715,10 @@
             <a:tailEnd type="triangle"/>
           </a:ln>
         </p:spPr>
+        <p:txBody>
+          <a:bodyPr/>
+          <a:p/>
+        </p:txBody>
       </p:sp>
       <p:sp>
         <p:nvSpPr>
@@ -3697,6 +3753,10 @@
             </a:outerShdw>
           </a:effectLst>
         </p:spPr>
+        <p:txBody>
+          <a:bodyPr/>
+          <a:p/>
+        </p:txBody>
       </p:sp>
       <p:sp>
         <p:nvSpPr>
@@ -3799,6 +3859,10 @@
             <a:tailEnd type="triangle"/>
           </a:ln>
         </p:spPr>
+        <p:txBody>
+          <a:bodyPr/>
+          <a:p/>
+        </p:txBody>
       </p:sp>
       <p:sp>
         <p:nvSpPr>
@@ -3833,6 +3897,10 @@
             </a:outerShdw>
           </a:effectLst>
         </p:spPr>
+        <p:txBody>
+          <a:bodyPr/>
+          <a:p/>
+        </p:txBody>
       </p:sp>
       <p:sp>
         <p:nvSpPr>
@@ -3974,6 +4042,10 @@
             <a:tailEnd type="triangle"/>
           </a:ln>
         </p:spPr>
+        <p:txBody>
+          <a:bodyPr/>
+          <a:p/>
+        </p:txBody>
       </p:sp>
       <p:sp>
         <p:nvSpPr>
@@ -4047,6 +4119,10 @@
             </a:outerShdw>
           </a:effectLst>
         </p:spPr>
+        <p:txBody>
+          <a:bodyPr/>
+          <a:p/>
+        </p:txBody>
       </p:sp>
       <p:sp>
         <p:nvSpPr>
@@ -4149,6 +4225,10 @@
             <a:tailEnd type="triangle"/>
           </a:ln>
         </p:spPr>
+        <p:txBody>
+          <a:bodyPr/>
+          <a:p/>
+        </p:txBody>
       </p:sp>
       <p:sp>
         <p:nvSpPr>
@@ -4183,6 +4263,10 @@
             </a:outerShdw>
           </a:effectLst>
         </p:spPr>
+        <p:txBody>
+          <a:bodyPr/>
+          <a:p/>
+        </p:txBody>
       </p:sp>
       <p:sp>
         <p:nvSpPr>
@@ -4285,6 +4369,10 @@
             <a:tailEnd type="triangle"/>
           </a:ln>
         </p:spPr>
+        <p:txBody>
+          <a:bodyPr/>
+          <a:p/>
+        </p:txBody>
       </p:sp>
       <p:sp>
         <p:nvSpPr>
@@ -4319,6 +4407,10 @@
             </a:outerShdw>
           </a:effectLst>
         </p:spPr>
+        <p:txBody>
+          <a:bodyPr/>
+          <a:p/>
+        </p:txBody>
       </p:sp>
       <p:sp>
         <p:nvSpPr>
@@ -4488,6 +4580,10 @@
           </a:solidFill>
           <a:ln/>
         </p:spPr>
+        <p:txBody>
+          <a:bodyPr/>
+          <a:p/>
+        </p:txBody>
       </p:sp>
       <p:pic>
         <p:nvPicPr>
@@ -5897,6 +5993,10 @@
           </a:solidFill>
           <a:ln/>
         </p:spPr>
+        <p:txBody>
+          <a:bodyPr/>
+          <a:p/>
+        </p:txBody>
       </p:sp>
       <p:pic>
         <p:nvPicPr>
@@ -5994,6 +6094,10 @@
             </a:outerShdw>
           </a:effectLst>
         </p:spPr>
+        <p:txBody>
+          <a:bodyPr/>
+          <a:p/>
+        </p:txBody>
       </p:sp>
       <p:sp>
         <p:nvSpPr>
@@ -6014,6 +6118,10 @@
           </a:solidFill>
           <a:ln/>
         </p:spPr>
+        <p:txBody>
+          <a:bodyPr/>
+          <a:p/>
+        </p:txBody>
       </p:sp>
       <p:pic>
         <p:nvPicPr>
@@ -6169,6 +6277,10 @@
             </a:outerShdw>
           </a:effectLst>
         </p:spPr>
+        <p:txBody>
+          <a:bodyPr/>
+          <a:p/>
+        </p:txBody>
       </p:sp>
       <p:sp>
         <p:nvSpPr>
@@ -6189,6 +6301,10 @@
           </a:solidFill>
           <a:ln/>
         </p:spPr>
+        <p:txBody>
+          <a:bodyPr/>
+          <a:p/>
+        </p:txBody>
       </p:sp>
       <p:pic>
         <p:nvPicPr>
@@ -6344,6 +6460,10 @@
             </a:outerShdw>
           </a:effectLst>
         </p:spPr>
+        <p:txBody>
+          <a:bodyPr/>
+          <a:p/>
+        </p:txBody>
       </p:sp>
       <p:sp>
         <p:nvSpPr>
@@ -6364,6 +6484,10 @@
           </a:solidFill>
           <a:ln/>
         </p:spPr>
+        <p:txBody>
+          <a:bodyPr/>
+          <a:p/>
+        </p:txBody>
       </p:sp>
       <p:pic>
         <p:nvPicPr>
@@ -6519,6 +6643,10 @@
             </a:outerShdw>
           </a:effectLst>
         </p:spPr>
+        <p:txBody>
+          <a:bodyPr/>
+          <a:p/>
+        </p:txBody>
       </p:sp>
       <p:sp>
         <p:nvSpPr>
@@ -6539,6 +6667,10 @@
           </a:solidFill>
           <a:ln/>
         </p:spPr>
+        <p:txBody>
+          <a:bodyPr/>
+          <a:p/>
+        </p:txBody>
       </p:sp>
       <p:pic>
         <p:nvPicPr>
@@ -6637,7 +6769,7 @@
                 <a:ea typeface="Calibri" pitchFamily="34" charset="-122"/>
                 <a:cs typeface="Calibri" pitchFamily="34" charset="-120"/>
               </a:rPr>
-              <a:t>OpenAI GPT</a:t>
+              <a:t>Claude (local CLI · $0)</a:t>
             </a:r>
             <a:endParaRPr lang="en-US" sz="1350" dirty="0"/>
           </a:p>
@@ -6676,6 +6808,10 @@
             </a:outerShdw>
           </a:effectLst>
         </p:spPr>
+        <p:txBody>
+          <a:bodyPr/>
+          <a:p/>
+        </p:txBody>
       </p:sp>
       <p:sp>
         <p:nvSpPr>
@@ -6696,6 +6832,10 @@
           </a:solidFill>
           <a:ln/>
         </p:spPr>
+        <p:txBody>
+          <a:bodyPr/>
+          <a:p/>
+        </p:txBody>
       </p:sp>
       <p:pic>
         <p:nvPicPr>
@@ -6833,6 +6973,10 @@
             </a:outerShdw>
           </a:effectLst>
         </p:spPr>
+        <p:txBody>
+          <a:bodyPr/>
+          <a:p/>
+        </p:txBody>
       </p:sp>
       <p:sp>
         <p:nvSpPr>
@@ -6853,6 +6997,10 @@
           </a:solidFill>
           <a:ln/>
         </p:spPr>
+        <p:txBody>
+          <a:bodyPr/>
+          <a:p/>
+        </p:txBody>
       </p:sp>
       <p:pic>
         <p:nvPicPr>
@@ -7065,6 +7213,10 @@
           </a:solidFill>
           <a:ln/>
         </p:spPr>
+        <p:txBody>
+          <a:bodyPr/>
+          <a:p/>
+        </p:txBody>
       </p:sp>
       <p:sp>
         <p:nvSpPr>
@@ -7085,6 +7237,10 @@
           </a:solidFill>
           <a:ln/>
         </p:spPr>
+        <p:txBody>
+          <a:bodyPr/>
+          <a:p/>
+        </p:txBody>
       </p:sp>
       <p:pic>
         <p:nvPicPr>
@@ -7423,6 +7579,10 @@
           </a:solidFill>
           <a:ln/>
         </p:spPr>
+        <p:txBody>
+          <a:bodyPr/>
+          <a:p/>
+        </p:txBody>
       </p:sp>
       <p:pic>
         <p:nvPicPr>
@@ -7520,6 +7680,10 @@
             </a:outerShdw>
           </a:effectLst>
         </p:spPr>
+        <p:txBody>
+          <a:bodyPr/>
+          <a:p/>
+        </p:txBody>
       </p:sp>
       <p:sp>
         <p:nvSpPr>
@@ -7540,6 +7704,10 @@
           </a:solidFill>
           <a:ln/>
         </p:spPr>
+        <p:txBody>
+          <a:bodyPr/>
+          <a:p/>
+        </p:txBody>
       </p:sp>
       <p:sp>
         <p:nvSpPr>
@@ -7698,6 +7866,10 @@
             </a:outerShdw>
           </a:effectLst>
         </p:spPr>
+        <p:txBody>
+          <a:bodyPr/>
+          <a:p/>
+        </p:txBody>
       </p:sp>
       <p:sp>
         <p:nvSpPr>
@@ -7718,6 +7890,10 @@
           </a:solidFill>
           <a:ln/>
         </p:spPr>
+        <p:txBody>
+          <a:bodyPr/>
+          <a:p/>
+        </p:txBody>
       </p:sp>
       <p:sp>
         <p:nvSpPr>
@@ -7897,6 +8073,10 @@
             </a:outerShdw>
           </a:effectLst>
         </p:spPr>
+        <p:txBody>
+          <a:bodyPr/>
+          <a:p/>
+        </p:txBody>
       </p:sp>
       <p:sp>
         <p:nvSpPr>
@@ -7917,6 +8097,10 @@
           </a:solidFill>
           <a:ln/>
         </p:spPr>
+        <p:txBody>
+          <a:bodyPr/>
+          <a:p/>
+        </p:txBody>
       </p:sp>
       <p:sp>
         <p:nvSpPr>
@@ -8132,6 +8316,10 @@
           </a:solidFill>
           <a:ln/>
         </p:spPr>
+        <p:txBody>
+          <a:bodyPr/>
+          <a:p/>
+        </p:txBody>
       </p:sp>
       <p:sp>
         <p:nvSpPr>
@@ -8154,6 +8342,10 @@
           </a:solidFill>
           <a:ln/>
         </p:spPr>
+        <p:txBody>
+          <a:bodyPr/>
+          <a:p/>
+        </p:txBody>
       </p:sp>
       <p:sp>
         <p:nvSpPr>
@@ -8174,6 +8366,10 @@
           </a:solidFill>
           <a:ln/>
         </p:spPr>
+        <p:txBody>
+          <a:bodyPr/>
+          <a:p/>
+        </p:txBody>
       </p:sp>
       <p:pic>
         <p:nvPicPr>
@@ -8310,9 +8506,1923 @@
                 <a:ea typeface="Calibri" pitchFamily="34" charset="-122"/>
                 <a:cs typeface="Calibri" pitchFamily="34" charset="-120"/>
               </a:rPr>
-              <a:t>Research Paper Answer Bot  •  Generative AI Pinnacle Capstone  •  &lt;Your Name&gt;</a:t>
+              <a:t>Research Paper Answer Bot  •  Generative AI Pinnacle Capstone  •  Jineesh T S</a:t>
             </a:r>
             <a:endParaRPr lang="en-US" sz="1300" dirty="0"/>
+          </a:p>
+        </p:txBody>
+      </p:sp>
+    </p:spTree>
+  </p:cSld>
+  <p:clrMapOvr>
+    <a:masterClrMapping/>
+  </p:clrMapOvr>
+</p:sld>
+</file>
+
+<file path=ppt/slides/slide18.xml><?xml version="1.0" encoding="utf-8"?>
+<p:sld xmlns:a="http://schemas.openxmlformats.org/drawingml/2006/main" xmlns:p="http://schemas.openxmlformats.org/presentationml/2006/main" xmlns:r="http://schemas.openxmlformats.org/officeDocument/2006/relationships">
+  <p:cSld>
+    <p:spTree>
+      <p:nvGrpSpPr>
+        <p:cNvPr id="1" name=""/>
+        <p:cNvGrpSpPr/>
+        <p:nvPr/>
+      </p:nvGrpSpPr>
+      <p:grpSpPr/>
+      <p:sp>
+        <p:nvSpPr>
+          <p:cNvPr id="2" name="Rectangle 1"/>
+          <p:cNvSpPr/>
+          <p:nvPr/>
+        </p:nvSpPr>
+        <p:spPr>
+          <a:xfrm>
+            <a:off x="0" y="0"/>
+            <a:ext cx="12192000" cy="6858000"/>
+          </a:xfrm>
+          <a:prstGeom prst="rect">
+            <a:avLst/>
+          </a:prstGeom>
+          <a:solidFill>
+            <a:srgbClr val="FFFFFF"/>
+          </a:solidFill>
+          <a:ln>
+            <a:noFill/>
+          </a:ln>
+          <a:effectLst/>
+        </p:spPr>
+        <p:style>
+          <a:lnRef idx="1">
+            <a:schemeClr val="accent1"/>
+          </a:lnRef>
+          <a:fillRef idx="3">
+            <a:schemeClr val="accent1"/>
+          </a:fillRef>
+          <a:effectRef idx="2">
+            <a:schemeClr val="accent1"/>
+          </a:effectRef>
+          <a:fontRef idx="minor">
+            <a:schemeClr val="lt1"/>
+          </a:fontRef>
+        </p:style>
+        <p:txBody>
+          <a:bodyPr rtlCol="0" anchor="ctr"/>
+          <a:lstStyle/>
+          <a:p>
+            <a:pPr algn="ctr"/>
+          </a:p>
+        </p:txBody>
+      </p:sp>
+      <p:sp>
+        <p:nvSpPr>
+          <p:cNvPr id="3" name="Rounded Rectangle 2"/>
+          <p:cNvSpPr/>
+          <p:nvPr/>
+        </p:nvSpPr>
+        <p:spPr>
+          <a:xfrm>
+            <a:off x="548640" y="411480"/>
+            <a:ext cx="566928" cy="566928"/>
+          </a:xfrm>
+          <a:prstGeom prst="roundRect">
+            <a:avLst/>
+          </a:prstGeom>
+          <a:solidFill>
+            <a:srgbClr val="14B8A6"/>
+          </a:solidFill>
+          <a:ln>
+            <a:noFill/>
+          </a:ln>
+          <a:effectLst/>
+        </p:spPr>
+        <p:style>
+          <a:lnRef idx="1">
+            <a:schemeClr val="accent1"/>
+          </a:lnRef>
+          <a:fillRef idx="3">
+            <a:schemeClr val="accent1"/>
+          </a:fillRef>
+          <a:effectRef idx="2">
+            <a:schemeClr val="accent1"/>
+          </a:effectRef>
+          <a:fontRef idx="minor">
+            <a:schemeClr val="lt1"/>
+          </a:fontRef>
+        </p:style>
+        <p:txBody>
+          <a:bodyPr rtlCol="0" anchor="ctr"/>
+          <a:lstStyle/>
+          <a:p>
+            <a:pPr algn="ctr"/>
+          </a:p>
+        </p:txBody>
+      </p:sp>
+      <p:sp>
+        <p:nvSpPr>
+          <p:cNvPr id="4" name="TextBox 3"/>
+          <p:cNvSpPr txBox="1"/>
+          <p:nvPr/>
+        </p:nvSpPr>
+        <p:spPr>
+          <a:xfrm>
+            <a:off x="1280160" y="365760"/>
+            <a:ext cx="10332720" cy="640080"/>
+          </a:xfrm>
+          <a:prstGeom prst="rect">
+            <a:avLst/>
+          </a:prstGeom>
+          <a:noFill/>
+        </p:spPr>
+        <p:txBody>
+          <a:bodyPr wrap="square" anchor="t">
+            <a:spAutoFit/>
+          </a:bodyPr>
+          <a:lstStyle/>
+          <a:p>
+            <a:pPr algn="l"/>
+            <a:r>
+              <a:rPr sz="2800" b="1">
+                <a:solidFill>
+                  <a:srgbClr val="0F172A"/>
+                </a:solidFill>
+                <a:latin typeface="Calibri"/>
+              </a:rPr>
+              <a:t>Retrieval — 7 Strategies + Smart Auto-Routing</a:t>
+            </a:r>
+          </a:p>
+        </p:txBody>
+      </p:sp>
+      <p:sp>
+        <p:nvSpPr>
+          <p:cNvPr id="5" name="TextBox 4"/>
+          <p:cNvSpPr txBox="1"/>
+          <p:nvPr/>
+        </p:nvSpPr>
+        <p:spPr>
+          <a:xfrm>
+            <a:off x="1298448" y="969264"/>
+            <a:ext cx="10332720" cy="457200"/>
+          </a:xfrm>
+          <a:prstGeom prst="rect">
+            <a:avLst/>
+          </a:prstGeom>
+          <a:noFill/>
+        </p:spPr>
+        <p:txBody>
+          <a:bodyPr wrap="square" anchor="t">
+            <a:spAutoFit/>
+          </a:bodyPr>
+          <a:lstStyle/>
+          <a:p>
+            <a:pPr algn="l"/>
+            <a:r>
+              <a:rPr sz="1400" b="0">
+                <a:solidFill>
+                  <a:srgbClr val="475569"/>
+                </a:solidFill>
+                <a:latin typeface="Calibri"/>
+              </a:rPr>
+              <a:t>Beyond the three baselines: four more strategies (one of them ours) and a gate that picks per question.</a:t>
+            </a:r>
+          </a:p>
+        </p:txBody>
+      </p:sp>
+      <p:sp>
+        <p:nvSpPr>
+          <p:cNvPr id="6" name="Rounded Rectangle 5"/>
+          <p:cNvSpPr/>
+          <p:nvPr/>
+        </p:nvSpPr>
+        <p:spPr>
+          <a:xfrm>
+            <a:off x="640080" y="1600200"/>
+            <a:ext cx="10908792" cy="749808"/>
+          </a:xfrm>
+          <a:prstGeom prst="roundRect">
+            <a:avLst/>
+          </a:prstGeom>
+          <a:solidFill>
+            <a:srgbClr val="F1F5F9"/>
+          </a:solidFill>
+          <a:ln>
+            <a:noFill/>
+          </a:ln>
+          <a:effectLst/>
+        </p:spPr>
+        <p:style>
+          <a:lnRef idx="1">
+            <a:schemeClr val="accent1"/>
+          </a:lnRef>
+          <a:fillRef idx="3">
+            <a:schemeClr val="accent1"/>
+          </a:fillRef>
+          <a:effectRef idx="2">
+            <a:schemeClr val="accent1"/>
+          </a:effectRef>
+          <a:fontRef idx="minor">
+            <a:schemeClr val="lt1"/>
+          </a:fontRef>
+        </p:style>
+        <p:txBody>
+          <a:bodyPr rtlCol="0" anchor="ctr"/>
+          <a:lstStyle/>
+          <a:p>
+            <a:pPr algn="ctr"/>
+          </a:p>
+        </p:txBody>
+      </p:sp>
+      <p:sp>
+        <p:nvSpPr>
+          <p:cNvPr id="7" name="Rounded Rectangle 6"/>
+          <p:cNvSpPr/>
+          <p:nvPr/>
+        </p:nvSpPr>
+        <p:spPr>
+          <a:xfrm>
+            <a:off x="640080" y="1600200"/>
+            <a:ext cx="91440" cy="749808"/>
+          </a:xfrm>
+          <a:prstGeom prst="roundRect">
+            <a:avLst/>
+          </a:prstGeom>
+          <a:solidFill>
+            <a:srgbClr val="0D9488"/>
+          </a:solidFill>
+          <a:ln>
+            <a:noFill/>
+          </a:ln>
+          <a:effectLst/>
+        </p:spPr>
+        <p:style>
+          <a:lnRef idx="1">
+            <a:schemeClr val="accent1"/>
+          </a:lnRef>
+          <a:fillRef idx="3">
+            <a:schemeClr val="accent1"/>
+          </a:fillRef>
+          <a:effectRef idx="2">
+            <a:schemeClr val="accent1"/>
+          </a:effectRef>
+          <a:fontRef idx="minor">
+            <a:schemeClr val="lt1"/>
+          </a:fontRef>
+        </p:style>
+        <p:txBody>
+          <a:bodyPr rtlCol="0" anchor="ctr"/>
+          <a:lstStyle/>
+          <a:p>
+            <a:pPr algn="ctr"/>
+          </a:p>
+        </p:txBody>
+      </p:sp>
+      <p:sp>
+        <p:nvSpPr>
+          <p:cNvPr id="8" name="TextBox 7"/>
+          <p:cNvSpPr txBox="1"/>
+          <p:nvPr/>
+        </p:nvSpPr>
+        <p:spPr>
+          <a:xfrm>
+            <a:off x="914400" y="1691640"/>
+            <a:ext cx="10241280" cy="365760"/>
+          </a:xfrm>
+          <a:prstGeom prst="rect">
+            <a:avLst/>
+          </a:prstGeom>
+          <a:noFill/>
+        </p:spPr>
+        <p:txBody>
+          <a:bodyPr wrap="square" anchor="t">
+            <a:spAutoFit/>
+          </a:bodyPr>
+          <a:lstStyle/>
+          <a:p>
+            <a:pPr algn="l"/>
+            <a:r>
+              <a:rPr sz="1500" b="1">
+                <a:solidFill>
+                  <a:srgbClr val="0F172A"/>
+                </a:solidFill>
+                <a:latin typeface="Calibri"/>
+              </a:rPr>
+              <a:t>Dense · Hybrid · Hybrid + Rerank — the baselines</a:t>
+            </a:r>
+          </a:p>
+        </p:txBody>
+      </p:sp>
+      <p:sp>
+        <p:nvSpPr>
+          <p:cNvPr id="9" name="TextBox 8"/>
+          <p:cNvSpPr txBox="1"/>
+          <p:nvPr/>
+        </p:nvSpPr>
+        <p:spPr>
+          <a:xfrm>
+            <a:off x="914400" y="2020824"/>
+            <a:ext cx="10424160" cy="292607"/>
+          </a:xfrm>
+          <a:prstGeom prst="rect">
+            <a:avLst/>
+          </a:prstGeom>
+          <a:noFill/>
+        </p:spPr>
+        <p:txBody>
+          <a:bodyPr wrap="square" anchor="t">
+            <a:spAutoFit/>
+          </a:bodyPr>
+          <a:lstStyle/>
+          <a:p>
+            <a:pPr algn="l"/>
+            <a:r>
+              <a:rPr sz="1200" b="0">
+                <a:solidFill>
+                  <a:srgbClr val="475569"/>
+                </a:solidFill>
+                <a:latin typeface="Calibri"/>
+              </a:rPr>
+              <a:t>Pure semantic similarity; dense + BM25 keyword fused with RRF; and hybrid re-scored by a cross-encoder.</a:t>
+            </a:r>
+          </a:p>
+        </p:txBody>
+      </p:sp>
+      <p:sp>
+        <p:nvSpPr>
+          <p:cNvPr id="10" name="Rounded Rectangle 9"/>
+          <p:cNvSpPr/>
+          <p:nvPr/>
+        </p:nvSpPr>
+        <p:spPr>
+          <a:xfrm>
+            <a:off x="640080" y="2496312"/>
+            <a:ext cx="10908792" cy="749808"/>
+          </a:xfrm>
+          <a:prstGeom prst="roundRect">
+            <a:avLst/>
+          </a:prstGeom>
+          <a:solidFill>
+            <a:srgbClr val="F1F5F9"/>
+          </a:solidFill>
+          <a:ln>
+            <a:noFill/>
+          </a:ln>
+          <a:effectLst/>
+        </p:spPr>
+        <p:style>
+          <a:lnRef idx="1">
+            <a:schemeClr val="accent1"/>
+          </a:lnRef>
+          <a:fillRef idx="3">
+            <a:schemeClr val="accent1"/>
+          </a:fillRef>
+          <a:effectRef idx="2">
+            <a:schemeClr val="accent1"/>
+          </a:effectRef>
+          <a:fontRef idx="minor">
+            <a:schemeClr val="lt1"/>
+          </a:fontRef>
+        </p:style>
+        <p:txBody>
+          <a:bodyPr rtlCol="0" anchor="ctr"/>
+          <a:lstStyle/>
+          <a:p>
+            <a:pPr algn="ctr"/>
+          </a:p>
+        </p:txBody>
+      </p:sp>
+      <p:sp>
+        <p:nvSpPr>
+          <p:cNvPr id="11" name="Rounded Rectangle 10"/>
+          <p:cNvSpPr/>
+          <p:nvPr/>
+        </p:nvSpPr>
+        <p:spPr>
+          <a:xfrm>
+            <a:off x="640080" y="2496312"/>
+            <a:ext cx="91440" cy="749808"/>
+          </a:xfrm>
+          <a:prstGeom prst="roundRect">
+            <a:avLst/>
+          </a:prstGeom>
+          <a:solidFill>
+            <a:srgbClr val="14B8A6"/>
+          </a:solidFill>
+          <a:ln>
+            <a:noFill/>
+          </a:ln>
+          <a:effectLst/>
+        </p:spPr>
+        <p:style>
+          <a:lnRef idx="1">
+            <a:schemeClr val="accent1"/>
+          </a:lnRef>
+          <a:fillRef idx="3">
+            <a:schemeClr val="accent1"/>
+          </a:fillRef>
+          <a:effectRef idx="2">
+            <a:schemeClr val="accent1"/>
+          </a:effectRef>
+          <a:fontRef idx="minor">
+            <a:schemeClr val="lt1"/>
+          </a:fontRef>
+        </p:style>
+        <p:txBody>
+          <a:bodyPr rtlCol="0" anchor="ctr"/>
+          <a:lstStyle/>
+          <a:p>
+            <a:pPr algn="ctr"/>
+          </a:p>
+        </p:txBody>
+      </p:sp>
+      <p:sp>
+        <p:nvSpPr>
+          <p:cNvPr id="12" name="TextBox 11"/>
+          <p:cNvSpPr txBox="1"/>
+          <p:nvPr/>
+        </p:nvSpPr>
+        <p:spPr>
+          <a:xfrm>
+            <a:off x="914400" y="2587752"/>
+            <a:ext cx="10241280" cy="365760"/>
+          </a:xfrm>
+          <a:prstGeom prst="rect">
+            <a:avLst/>
+          </a:prstGeom>
+          <a:noFill/>
+        </p:spPr>
+        <p:txBody>
+          <a:bodyPr wrap="square" anchor="t">
+            <a:spAutoFit/>
+          </a:bodyPr>
+          <a:lstStyle/>
+          <a:p>
+            <a:pPr algn="l"/>
+            <a:r>
+              <a:rPr sz="1500" b="1">
+                <a:solidFill>
+                  <a:srgbClr val="0F172A"/>
+                </a:solidFill>
+                <a:latin typeface="Calibri"/>
+              </a:rPr>
+              <a:t>MMR — diversity</a:t>
+            </a:r>
+          </a:p>
+        </p:txBody>
+      </p:sp>
+      <p:sp>
+        <p:nvSpPr>
+          <p:cNvPr id="13" name="TextBox 12"/>
+          <p:cNvSpPr txBox="1"/>
+          <p:nvPr/>
+        </p:nvSpPr>
+        <p:spPr>
+          <a:xfrm>
+            <a:off x="914400" y="2916936"/>
+            <a:ext cx="10424160" cy="292607"/>
+          </a:xfrm>
+          <a:prstGeom prst="rect">
+            <a:avLst/>
+          </a:prstGeom>
+          <a:noFill/>
+        </p:spPr>
+        <p:txBody>
+          <a:bodyPr wrap="square" anchor="t">
+            <a:spAutoFit/>
+          </a:bodyPr>
+          <a:lstStyle/>
+          <a:p>
+            <a:pPr algn="l"/>
+            <a:r>
+              <a:rPr sz="1200" b="0">
+                <a:solidFill>
+                  <a:srgbClr val="475569"/>
+                </a:solidFill>
+                <a:latin typeface="Calibri"/>
+              </a:rPr>
+              <a:t>Max-Marginal-Relevance over the dense store: trims near-duplicate chunks so the context spans more of the corpus. No LLM call.</a:t>
+            </a:r>
+          </a:p>
+        </p:txBody>
+      </p:sp>
+      <p:sp>
+        <p:nvSpPr>
+          <p:cNvPr id="14" name="Rounded Rectangle 13"/>
+          <p:cNvSpPr/>
+          <p:nvPr/>
+        </p:nvSpPr>
+        <p:spPr>
+          <a:xfrm>
+            <a:off x="640080" y="3392424"/>
+            <a:ext cx="10908792" cy="749808"/>
+          </a:xfrm>
+          <a:prstGeom prst="roundRect">
+            <a:avLst/>
+          </a:prstGeom>
+          <a:solidFill>
+            <a:srgbClr val="F1F5F9"/>
+          </a:solidFill>
+          <a:ln>
+            <a:noFill/>
+          </a:ln>
+          <a:effectLst/>
+        </p:spPr>
+        <p:style>
+          <a:lnRef idx="1">
+            <a:schemeClr val="accent1"/>
+          </a:lnRef>
+          <a:fillRef idx="3">
+            <a:schemeClr val="accent1"/>
+          </a:fillRef>
+          <a:effectRef idx="2">
+            <a:schemeClr val="accent1"/>
+          </a:effectRef>
+          <a:fontRef idx="minor">
+            <a:schemeClr val="lt1"/>
+          </a:fontRef>
+        </p:style>
+        <p:txBody>
+          <a:bodyPr rtlCol="0" anchor="ctr"/>
+          <a:lstStyle/>
+          <a:p>
+            <a:pPr algn="ctr"/>
+          </a:p>
+        </p:txBody>
+      </p:sp>
+      <p:sp>
+        <p:nvSpPr>
+          <p:cNvPr id="15" name="Rounded Rectangle 14"/>
+          <p:cNvSpPr/>
+          <p:nvPr/>
+        </p:nvSpPr>
+        <p:spPr>
+          <a:xfrm>
+            <a:off x="640080" y="3392424"/>
+            <a:ext cx="91440" cy="749808"/>
+          </a:xfrm>
+          <a:prstGeom prst="roundRect">
+            <a:avLst/>
+          </a:prstGeom>
+          <a:solidFill>
+            <a:srgbClr val="14B8A6"/>
+          </a:solidFill>
+          <a:ln>
+            <a:noFill/>
+          </a:ln>
+          <a:effectLst/>
+        </p:spPr>
+        <p:style>
+          <a:lnRef idx="1">
+            <a:schemeClr val="accent1"/>
+          </a:lnRef>
+          <a:fillRef idx="3">
+            <a:schemeClr val="accent1"/>
+          </a:fillRef>
+          <a:effectRef idx="2">
+            <a:schemeClr val="accent1"/>
+          </a:effectRef>
+          <a:fontRef idx="minor">
+            <a:schemeClr val="lt1"/>
+          </a:fontRef>
+        </p:style>
+        <p:txBody>
+          <a:bodyPr rtlCol="0" anchor="ctr"/>
+          <a:lstStyle/>
+          <a:p>
+            <a:pPr algn="ctr"/>
+          </a:p>
+        </p:txBody>
+      </p:sp>
+      <p:sp>
+        <p:nvSpPr>
+          <p:cNvPr id="16" name="TextBox 15"/>
+          <p:cNvSpPr txBox="1"/>
+          <p:nvPr/>
+        </p:nvSpPr>
+        <p:spPr>
+          <a:xfrm>
+            <a:off x="914400" y="3483864"/>
+            <a:ext cx="10241280" cy="365760"/>
+          </a:xfrm>
+          <a:prstGeom prst="rect">
+            <a:avLst/>
+          </a:prstGeom>
+          <a:noFill/>
+        </p:spPr>
+        <p:txBody>
+          <a:bodyPr wrap="square" anchor="t">
+            <a:spAutoFit/>
+          </a:bodyPr>
+          <a:lstStyle/>
+          <a:p>
+            <a:pPr algn="l"/>
+            <a:r>
+              <a:rPr sz="1500" b="1">
+                <a:solidFill>
+                  <a:srgbClr val="0F172A"/>
+                </a:solidFill>
+                <a:latin typeface="Calibri"/>
+              </a:rPr>
+              <a:t>Multi-Query  &amp;  HyDE — recall boosters</a:t>
+            </a:r>
+          </a:p>
+        </p:txBody>
+      </p:sp>
+      <p:sp>
+        <p:nvSpPr>
+          <p:cNvPr id="17" name="TextBox 16"/>
+          <p:cNvSpPr txBox="1"/>
+          <p:nvPr/>
+        </p:nvSpPr>
+        <p:spPr>
+          <a:xfrm>
+            <a:off x="914400" y="3813048"/>
+            <a:ext cx="10424160" cy="292607"/>
+          </a:xfrm>
+          <a:prstGeom prst="rect">
+            <a:avLst/>
+          </a:prstGeom>
+          <a:noFill/>
+        </p:spPr>
+        <p:txBody>
+          <a:bodyPr wrap="square" anchor="t">
+            <a:spAutoFit/>
+          </a:bodyPr>
+          <a:lstStyle/>
+          <a:p>
+            <a:pPr algn="l"/>
+            <a:r>
+              <a:rPr sz="1200" b="0">
+                <a:solidFill>
+                  <a:srgbClr val="475569"/>
+                </a:solidFill>
+                <a:latin typeface="Calibri"/>
+              </a:rPr>
+              <a:t>Multi-Query: an LLM paraphrases the question, retrieves each, fuses. HyDE: embed an LLM-drafted hypothetical answer and retrieve against it.</a:t>
+            </a:r>
+          </a:p>
+        </p:txBody>
+      </p:sp>
+      <p:sp>
+        <p:nvSpPr>
+          <p:cNvPr id="18" name="Rounded Rectangle 17"/>
+          <p:cNvSpPr/>
+          <p:nvPr/>
+        </p:nvSpPr>
+        <p:spPr>
+          <a:xfrm>
+            <a:off x="640080" y="4288536"/>
+            <a:ext cx="10908792" cy="786384"/>
+          </a:xfrm>
+          <a:prstGeom prst="roundRect">
+            <a:avLst/>
+          </a:prstGeom>
+          <a:solidFill>
+            <a:srgbClr val="F1F5F9"/>
+          </a:solidFill>
+          <a:ln>
+            <a:noFill/>
+          </a:ln>
+          <a:effectLst/>
+        </p:spPr>
+        <p:style>
+          <a:lnRef idx="1">
+            <a:schemeClr val="accent1"/>
+          </a:lnRef>
+          <a:fillRef idx="3">
+            <a:schemeClr val="accent1"/>
+          </a:fillRef>
+          <a:effectRef idx="2">
+            <a:schemeClr val="accent1"/>
+          </a:effectRef>
+          <a:fontRef idx="minor">
+            <a:schemeClr val="lt1"/>
+          </a:fontRef>
+        </p:style>
+        <p:txBody>
+          <a:bodyPr rtlCol="0" anchor="ctr"/>
+          <a:lstStyle/>
+          <a:p>
+            <a:pPr algn="ctr"/>
+          </a:p>
+        </p:txBody>
+      </p:sp>
+      <p:sp>
+        <p:nvSpPr>
+          <p:cNvPr id="19" name="Rounded Rectangle 18"/>
+          <p:cNvSpPr/>
+          <p:nvPr/>
+        </p:nvSpPr>
+        <p:spPr>
+          <a:xfrm>
+            <a:off x="640080" y="4288536"/>
+            <a:ext cx="91440" cy="786384"/>
+          </a:xfrm>
+          <a:prstGeom prst="roundRect">
+            <a:avLst/>
+          </a:prstGeom>
+          <a:solidFill>
+            <a:srgbClr val="2DD4BF"/>
+          </a:solidFill>
+          <a:ln>
+            <a:noFill/>
+          </a:ln>
+          <a:effectLst/>
+        </p:spPr>
+        <p:style>
+          <a:lnRef idx="1">
+            <a:schemeClr val="accent1"/>
+          </a:lnRef>
+          <a:fillRef idx="3">
+            <a:schemeClr val="accent1"/>
+          </a:fillRef>
+          <a:effectRef idx="2">
+            <a:schemeClr val="accent1"/>
+          </a:effectRef>
+          <a:fontRef idx="minor">
+            <a:schemeClr val="lt1"/>
+          </a:fontRef>
+        </p:style>
+        <p:txBody>
+          <a:bodyPr rtlCol="0" anchor="ctr"/>
+          <a:lstStyle/>
+          <a:p>
+            <a:pPr algn="ctr"/>
+          </a:p>
+        </p:txBody>
+      </p:sp>
+      <p:sp>
+        <p:nvSpPr>
+          <p:cNvPr id="20" name="TextBox 19"/>
+          <p:cNvSpPr txBox="1"/>
+          <p:nvPr/>
+        </p:nvSpPr>
+        <p:spPr>
+          <a:xfrm>
+            <a:off x="914400" y="4379976"/>
+            <a:ext cx="10241280" cy="365760"/>
+          </a:xfrm>
+          <a:prstGeom prst="rect">
+            <a:avLst/>
+          </a:prstGeom>
+          <a:noFill/>
+        </p:spPr>
+        <p:txBody>
+          <a:bodyPr wrap="square" anchor="t">
+            <a:spAutoFit/>
+          </a:bodyPr>
+          <a:lstStyle/>
+          <a:p>
+            <a:pPr algn="l"/>
+            <a:r>
+              <a:rPr sz="1500" b="1">
+                <a:solidFill>
+                  <a:srgbClr val="0F172A"/>
+                </a:solidFill>
+                <a:latin typeface="Calibri"/>
+              </a:rPr>
+              <a:t>Adaptive Hybrid — our own strategy</a:t>
+            </a:r>
+          </a:p>
+        </p:txBody>
+      </p:sp>
+      <p:sp>
+        <p:nvSpPr>
+          <p:cNvPr id="21" name="TextBox 20"/>
+          <p:cNvSpPr txBox="1"/>
+          <p:nvPr/>
+        </p:nvSpPr>
+        <p:spPr>
+          <a:xfrm>
+            <a:off x="914400" y="4709160"/>
+            <a:ext cx="10424160" cy="329184"/>
+          </a:xfrm>
+          <a:prstGeom prst="rect">
+            <a:avLst/>
+          </a:prstGeom>
+          <a:noFill/>
+        </p:spPr>
+        <p:txBody>
+          <a:bodyPr wrap="square" anchor="t">
+            <a:spAutoFit/>
+          </a:bodyPr>
+          <a:lstStyle/>
+          <a:p>
+            <a:pPr algn="l"/>
+            <a:r>
+              <a:rPr sz="1200" b="0">
+                <a:solidFill>
+                  <a:srgbClr val="475569"/>
+                </a:solidFill>
+                <a:latin typeface="Calibri"/>
+              </a:rPr>
+              <a:t>Reads the query's shape (acronym / short / quoted → lean BM25;  long / conceptual → lean semantic), sets the weights, then MMR. No extra LLM call.</a:t>
+            </a:r>
+          </a:p>
+        </p:txBody>
+      </p:sp>
+      <p:sp>
+        <p:nvSpPr>
+          <p:cNvPr id="22" name="TextBox 21"/>
+          <p:cNvSpPr txBox="1"/>
+          <p:nvPr/>
+        </p:nvSpPr>
+        <p:spPr>
+          <a:xfrm>
+            <a:off x="9966960" y="4398264"/>
+            <a:ext cx="1463040" cy="310896"/>
+          </a:xfrm>
+          <a:prstGeom prst="rect">
+            <a:avLst/>
+          </a:prstGeom>
+          <a:noFill/>
+        </p:spPr>
+        <p:txBody>
+          <a:bodyPr wrap="square" anchor="t">
+            <a:spAutoFit/>
+          </a:bodyPr>
+          <a:lstStyle/>
+          <a:p>
+            <a:pPr algn="ctr"/>
+            <a:r>
+              <a:rPr sz="950" b="1">
+                <a:solidFill>
+                  <a:srgbClr val="FFFFFF"/>
+                </a:solidFill>
+                <a:latin typeface="Calibri"/>
+              </a:rPr>
+              <a:t>OURS</a:t>
+            </a:r>
+          </a:p>
+        </p:txBody>
+      </p:sp>
+      <p:sp>
+        <p:nvSpPr>
+          <p:cNvPr id="23" name="Rounded Rectangle 22"/>
+          <p:cNvSpPr/>
+          <p:nvPr/>
+        </p:nvSpPr>
+        <p:spPr>
+          <a:xfrm>
+            <a:off x="640080" y="5221224"/>
+            <a:ext cx="10908792" cy="749808"/>
+          </a:xfrm>
+          <a:prstGeom prst="roundRect">
+            <a:avLst/>
+          </a:prstGeom>
+          <a:solidFill>
+            <a:srgbClr val="F1F5F9"/>
+          </a:solidFill>
+          <a:ln>
+            <a:noFill/>
+          </a:ln>
+          <a:effectLst/>
+        </p:spPr>
+        <p:style>
+          <a:lnRef idx="1">
+            <a:schemeClr val="accent1"/>
+          </a:lnRef>
+          <a:fillRef idx="3">
+            <a:schemeClr val="accent1"/>
+          </a:fillRef>
+          <a:effectRef idx="2">
+            <a:schemeClr val="accent1"/>
+          </a:effectRef>
+          <a:fontRef idx="minor">
+            <a:schemeClr val="lt1"/>
+          </a:fontRef>
+        </p:style>
+        <p:txBody>
+          <a:bodyPr rtlCol="0" anchor="ctr"/>
+          <a:lstStyle/>
+          <a:p>
+            <a:pPr algn="ctr"/>
+          </a:p>
+        </p:txBody>
+      </p:sp>
+      <p:sp>
+        <p:nvSpPr>
+          <p:cNvPr id="24" name="Rounded Rectangle 23"/>
+          <p:cNvSpPr/>
+          <p:nvPr/>
+        </p:nvSpPr>
+        <p:spPr>
+          <a:xfrm>
+            <a:off x="640080" y="5221224"/>
+            <a:ext cx="91440" cy="749808"/>
+          </a:xfrm>
+          <a:prstGeom prst="roundRect">
+            <a:avLst/>
+          </a:prstGeom>
+          <a:solidFill>
+            <a:srgbClr val="1E293B"/>
+          </a:solidFill>
+          <a:ln>
+            <a:noFill/>
+          </a:ln>
+          <a:effectLst/>
+        </p:spPr>
+        <p:style>
+          <a:lnRef idx="1">
+            <a:schemeClr val="accent1"/>
+          </a:lnRef>
+          <a:fillRef idx="3">
+            <a:schemeClr val="accent1"/>
+          </a:fillRef>
+          <a:effectRef idx="2">
+            <a:schemeClr val="accent1"/>
+          </a:effectRef>
+          <a:fontRef idx="minor">
+            <a:schemeClr val="lt1"/>
+          </a:fontRef>
+        </p:style>
+        <p:txBody>
+          <a:bodyPr rtlCol="0" anchor="ctr"/>
+          <a:lstStyle/>
+          <a:p>
+            <a:pPr algn="ctr"/>
+          </a:p>
+        </p:txBody>
+      </p:sp>
+      <p:sp>
+        <p:nvSpPr>
+          <p:cNvPr id="25" name="TextBox 24"/>
+          <p:cNvSpPr txBox="1"/>
+          <p:nvPr/>
+        </p:nvSpPr>
+        <p:spPr>
+          <a:xfrm>
+            <a:off x="914400" y="5312664"/>
+            <a:ext cx="10241280" cy="365760"/>
+          </a:xfrm>
+          <a:prstGeom prst="rect">
+            <a:avLst/>
+          </a:prstGeom>
+          <a:noFill/>
+        </p:spPr>
+        <p:txBody>
+          <a:bodyPr wrap="square" anchor="t">
+            <a:spAutoFit/>
+          </a:bodyPr>
+          <a:lstStyle/>
+          <a:p>
+            <a:pPr algn="l"/>
+            <a:r>
+              <a:rPr sz="1500" b="1">
+                <a:solidFill>
+                  <a:srgbClr val="0F172A"/>
+                </a:solidFill>
+                <a:latin typeface="Calibri"/>
+              </a:rPr>
+              <a:t>Auto — the query gate routes for you</a:t>
+            </a:r>
+          </a:p>
+        </p:txBody>
+      </p:sp>
+      <p:sp>
+        <p:nvSpPr>
+          <p:cNvPr id="26" name="TextBox 25"/>
+          <p:cNvSpPr txBox="1"/>
+          <p:nvPr/>
+        </p:nvSpPr>
+        <p:spPr>
+          <a:xfrm>
+            <a:off x="914400" y="5641848"/>
+            <a:ext cx="10424160" cy="292607"/>
+          </a:xfrm>
+          <a:prstGeom prst="rect">
+            <a:avLst/>
+          </a:prstGeom>
+          <a:noFill/>
+        </p:spPr>
+        <p:txBody>
+          <a:bodyPr wrap="square" anchor="t">
+            <a:spAutoFit/>
+          </a:bodyPr>
+          <a:lstStyle/>
+          <a:p>
+            <a:pPr algn="l"/>
+            <a:r>
+              <a:rPr sz="1200" b="0">
+                <a:solidFill>
+                  <a:srgbClr val="475569"/>
+                </a:solidFill>
+                <a:latin typeface="Calibri"/>
+              </a:rPr>
+              <a:t>Pick 'Auto' and a fast classifier chooses the strategy per question — the keyword-vs-vector decision, made from the prompt itself.</a:t>
+            </a:r>
+          </a:p>
+        </p:txBody>
+      </p:sp>
+      <p:sp>
+        <p:nvSpPr>
+          <p:cNvPr id="27" name="TextBox 26"/>
+          <p:cNvSpPr txBox="1"/>
+          <p:nvPr/>
+        </p:nvSpPr>
+        <p:spPr>
+          <a:xfrm>
+            <a:off x="11430000" y="6400800"/>
+            <a:ext cx="457200" cy="274320"/>
+          </a:xfrm>
+          <a:prstGeom prst="rect">
+            <a:avLst/>
+          </a:prstGeom>
+          <a:noFill/>
+        </p:spPr>
+        <p:txBody>
+          <a:bodyPr wrap="square" anchor="t">
+            <a:spAutoFit/>
+          </a:bodyPr>
+          <a:lstStyle/>
+          <a:p>
+            <a:pPr algn="l"/>
+            <a:r>
+              <a:rPr sz="1100" b="0">
+                <a:solidFill>
+                  <a:srgbClr val="64748B"/>
+                </a:solidFill>
+                <a:latin typeface="Calibri"/>
+              </a:rPr>
+              <a:t>9</a:t>
+            </a:r>
+          </a:p>
+        </p:txBody>
+      </p:sp>
+    </p:spTree>
+  </p:cSld>
+  <p:clrMapOvr>
+    <a:masterClrMapping/>
+  </p:clrMapOvr>
+</p:sld>
+</file>
+
+<file path=ppt/slides/slide19.xml><?xml version="1.0" encoding="utf-8"?>
+<p:sld xmlns:a="http://schemas.openxmlformats.org/drawingml/2006/main" xmlns:p="http://schemas.openxmlformats.org/presentationml/2006/main" xmlns:r="http://schemas.openxmlformats.org/officeDocument/2006/relationships">
+  <p:cSld>
+    <p:spTree>
+      <p:nvGrpSpPr>
+        <p:cNvPr id="1" name=""/>
+        <p:cNvGrpSpPr/>
+        <p:nvPr/>
+      </p:nvGrpSpPr>
+      <p:grpSpPr/>
+      <p:sp>
+        <p:nvSpPr>
+          <p:cNvPr id="2" name="Rectangle 1"/>
+          <p:cNvSpPr/>
+          <p:nvPr/>
+        </p:nvSpPr>
+        <p:spPr>
+          <a:xfrm>
+            <a:off x="0" y="0"/>
+            <a:ext cx="12192000" cy="6858000"/>
+          </a:xfrm>
+          <a:prstGeom prst="rect">
+            <a:avLst/>
+          </a:prstGeom>
+          <a:solidFill>
+            <a:srgbClr val="FFFFFF"/>
+          </a:solidFill>
+          <a:ln>
+            <a:noFill/>
+          </a:ln>
+          <a:effectLst/>
+        </p:spPr>
+        <p:style>
+          <a:lnRef idx="1">
+            <a:schemeClr val="accent1"/>
+          </a:lnRef>
+          <a:fillRef idx="3">
+            <a:schemeClr val="accent1"/>
+          </a:fillRef>
+          <a:effectRef idx="2">
+            <a:schemeClr val="accent1"/>
+          </a:effectRef>
+          <a:fontRef idx="minor">
+            <a:schemeClr val="lt1"/>
+          </a:fontRef>
+        </p:style>
+        <p:txBody>
+          <a:bodyPr rtlCol="0" anchor="ctr"/>
+          <a:lstStyle/>
+          <a:p>
+            <a:pPr algn="ctr"/>
+          </a:p>
+        </p:txBody>
+      </p:sp>
+      <p:sp>
+        <p:nvSpPr>
+          <p:cNvPr id="3" name="Rounded Rectangle 2"/>
+          <p:cNvSpPr/>
+          <p:nvPr/>
+        </p:nvSpPr>
+        <p:spPr>
+          <a:xfrm>
+            <a:off x="548640" y="411480"/>
+            <a:ext cx="566928" cy="566928"/>
+          </a:xfrm>
+          <a:prstGeom prst="roundRect">
+            <a:avLst/>
+          </a:prstGeom>
+          <a:solidFill>
+            <a:srgbClr val="14B8A6"/>
+          </a:solidFill>
+          <a:ln>
+            <a:noFill/>
+          </a:ln>
+          <a:effectLst/>
+        </p:spPr>
+        <p:style>
+          <a:lnRef idx="1">
+            <a:schemeClr val="accent1"/>
+          </a:lnRef>
+          <a:fillRef idx="3">
+            <a:schemeClr val="accent1"/>
+          </a:fillRef>
+          <a:effectRef idx="2">
+            <a:schemeClr val="accent1"/>
+          </a:effectRef>
+          <a:fontRef idx="minor">
+            <a:schemeClr val="lt1"/>
+          </a:fontRef>
+        </p:style>
+        <p:txBody>
+          <a:bodyPr rtlCol="0" anchor="ctr"/>
+          <a:lstStyle/>
+          <a:p>
+            <a:pPr algn="ctr"/>
+          </a:p>
+        </p:txBody>
+      </p:sp>
+      <p:sp>
+        <p:nvSpPr>
+          <p:cNvPr id="4" name="TextBox 3"/>
+          <p:cNvSpPr txBox="1"/>
+          <p:nvPr/>
+        </p:nvSpPr>
+        <p:spPr>
+          <a:xfrm>
+            <a:off x="1280160" y="365760"/>
+            <a:ext cx="10332720" cy="640080"/>
+          </a:xfrm>
+          <a:prstGeom prst="rect">
+            <a:avLst/>
+          </a:prstGeom>
+          <a:noFill/>
+        </p:spPr>
+        <p:txBody>
+          <a:bodyPr wrap="square" anchor="t">
+            <a:spAutoFit/>
+          </a:bodyPr>
+          <a:lstStyle/>
+          <a:p>
+            <a:pPr algn="l"/>
+            <a:r>
+              <a:rPr sz="2800" b="1">
+                <a:solidFill>
+                  <a:srgbClr val="0F172A"/>
+                </a:solidFill>
+                <a:latin typeface="Calibri"/>
+              </a:rPr>
+              <a:t>Pre-RAG Query Gate — quality-check the prompt</a:t>
+            </a:r>
+          </a:p>
+        </p:txBody>
+      </p:sp>
+      <p:sp>
+        <p:nvSpPr>
+          <p:cNvPr id="5" name="TextBox 4"/>
+          <p:cNvSpPr txBox="1"/>
+          <p:nvPr/>
+        </p:nvSpPr>
+        <p:spPr>
+          <a:xfrm>
+            <a:off x="1298448" y="969264"/>
+            <a:ext cx="10332720" cy="457200"/>
+          </a:xfrm>
+          <a:prstGeom prst="rect">
+            <a:avLst/>
+          </a:prstGeom>
+          <a:noFill/>
+        </p:spPr>
+        <p:txBody>
+          <a:bodyPr wrap="square" anchor="t">
+            <a:spAutoFit/>
+          </a:bodyPr>
+          <a:lstStyle/>
+          <a:p>
+            <a:pPr algn="l"/>
+            <a:r>
+              <a:rPr sz="1400" b="0">
+                <a:solidFill>
+                  <a:srgbClr val="475569"/>
+                </a:solidFill>
+                <a:latin typeface="Calibri"/>
+              </a:rPr>
+              <a:t>The mentor's idea: route by input quality, and ask before you retrieve. Garbage-in is stopped at the door.</a:t>
+            </a:r>
+          </a:p>
+        </p:txBody>
+      </p:sp>
+      <p:sp>
+        <p:nvSpPr>
+          <p:cNvPr id="6" name="Rounded Rectangle 5"/>
+          <p:cNvSpPr/>
+          <p:nvPr/>
+        </p:nvSpPr>
+        <p:spPr>
+          <a:xfrm>
+            <a:off x="640080" y="1600200"/>
+            <a:ext cx="10908792" cy="768096"/>
+          </a:xfrm>
+          <a:prstGeom prst="roundRect">
+            <a:avLst/>
+          </a:prstGeom>
+          <a:solidFill>
+            <a:srgbClr val="F1F5F9"/>
+          </a:solidFill>
+          <a:ln>
+            <a:noFill/>
+          </a:ln>
+          <a:effectLst/>
+        </p:spPr>
+        <p:style>
+          <a:lnRef idx="1">
+            <a:schemeClr val="accent1"/>
+          </a:lnRef>
+          <a:fillRef idx="3">
+            <a:schemeClr val="accent1"/>
+          </a:fillRef>
+          <a:effectRef idx="2">
+            <a:schemeClr val="accent1"/>
+          </a:effectRef>
+          <a:fontRef idx="minor">
+            <a:schemeClr val="lt1"/>
+          </a:fontRef>
+        </p:style>
+        <p:txBody>
+          <a:bodyPr rtlCol="0" anchor="ctr"/>
+          <a:lstStyle/>
+          <a:p>
+            <a:pPr algn="ctr"/>
+          </a:p>
+        </p:txBody>
+      </p:sp>
+      <p:sp>
+        <p:nvSpPr>
+          <p:cNvPr id="7" name="Rounded Rectangle 6"/>
+          <p:cNvSpPr/>
+          <p:nvPr/>
+        </p:nvSpPr>
+        <p:spPr>
+          <a:xfrm>
+            <a:off x="640080" y="1600200"/>
+            <a:ext cx="91440" cy="768096"/>
+          </a:xfrm>
+          <a:prstGeom prst="roundRect">
+            <a:avLst/>
+          </a:prstGeom>
+          <a:solidFill>
+            <a:srgbClr val="0D9488"/>
+          </a:solidFill>
+          <a:ln>
+            <a:noFill/>
+          </a:ln>
+          <a:effectLst/>
+        </p:spPr>
+        <p:style>
+          <a:lnRef idx="1">
+            <a:schemeClr val="accent1"/>
+          </a:lnRef>
+          <a:fillRef idx="3">
+            <a:schemeClr val="accent1"/>
+          </a:fillRef>
+          <a:effectRef idx="2">
+            <a:schemeClr val="accent1"/>
+          </a:effectRef>
+          <a:fontRef idx="minor">
+            <a:schemeClr val="lt1"/>
+          </a:fontRef>
+        </p:style>
+        <p:txBody>
+          <a:bodyPr rtlCol="0" anchor="ctr"/>
+          <a:lstStyle/>
+          <a:p>
+            <a:pPr algn="ctr"/>
+          </a:p>
+        </p:txBody>
+      </p:sp>
+      <p:sp>
+        <p:nvSpPr>
+          <p:cNvPr id="8" name="TextBox 7"/>
+          <p:cNvSpPr txBox="1"/>
+          <p:nvPr/>
+        </p:nvSpPr>
+        <p:spPr>
+          <a:xfrm>
+            <a:off x="914400" y="1691640"/>
+            <a:ext cx="10241280" cy="365760"/>
+          </a:xfrm>
+          <a:prstGeom prst="rect">
+            <a:avLst/>
+          </a:prstGeom>
+          <a:noFill/>
+        </p:spPr>
+        <p:txBody>
+          <a:bodyPr wrap="square" anchor="t">
+            <a:spAutoFit/>
+          </a:bodyPr>
+          <a:lstStyle/>
+          <a:p>
+            <a:pPr algn="l"/>
+            <a:r>
+              <a:rPr sz="1500" b="1">
+                <a:solidFill>
+                  <a:srgbClr val="0F172A"/>
+                </a:solidFill>
+                <a:latin typeface="Calibri"/>
+              </a:rPr>
+              <a:t>1 · Classify</a:t>
+            </a:r>
+          </a:p>
+        </p:txBody>
+      </p:sp>
+      <p:sp>
+        <p:nvSpPr>
+          <p:cNvPr id="9" name="TextBox 8"/>
+          <p:cNvSpPr txBox="1"/>
+          <p:nvPr/>
+        </p:nvSpPr>
+        <p:spPr>
+          <a:xfrm>
+            <a:off x="914400" y="2020824"/>
+            <a:ext cx="10424160" cy="310896"/>
+          </a:xfrm>
+          <a:prstGeom prst="rect">
+            <a:avLst/>
+          </a:prstGeom>
+          <a:noFill/>
+        </p:spPr>
+        <p:txBody>
+          <a:bodyPr wrap="square" anchor="t">
+            <a:spAutoFit/>
+          </a:bodyPr>
+          <a:lstStyle/>
+          <a:p>
+            <a:pPr algn="l"/>
+            <a:r>
+              <a:rPr sz="1200" b="0">
+                <a:solidFill>
+                  <a:srgbClr val="475569"/>
+                </a:solidFill>
+                <a:latin typeface="Calibri"/>
+              </a:rPr>
+              <a:t>A fast (haiku) LLM labels the question: clear / ambiguous / too-broad / out-of-scope — before any search runs.</a:t>
+            </a:r>
+          </a:p>
+        </p:txBody>
+      </p:sp>
+      <p:sp>
+        <p:nvSpPr>
+          <p:cNvPr id="10" name="Rounded Rectangle 9"/>
+          <p:cNvSpPr/>
+          <p:nvPr/>
+        </p:nvSpPr>
+        <p:spPr>
+          <a:xfrm>
+            <a:off x="640080" y="2514600"/>
+            <a:ext cx="10908792" cy="841248"/>
+          </a:xfrm>
+          <a:prstGeom prst="roundRect">
+            <a:avLst/>
+          </a:prstGeom>
+          <a:solidFill>
+            <a:srgbClr val="F1F5F9"/>
+          </a:solidFill>
+          <a:ln>
+            <a:noFill/>
+          </a:ln>
+          <a:effectLst/>
+        </p:spPr>
+        <p:style>
+          <a:lnRef idx="1">
+            <a:schemeClr val="accent1"/>
+          </a:lnRef>
+          <a:fillRef idx="3">
+            <a:schemeClr val="accent1"/>
+          </a:fillRef>
+          <a:effectRef idx="2">
+            <a:schemeClr val="accent1"/>
+          </a:effectRef>
+          <a:fontRef idx="minor">
+            <a:schemeClr val="lt1"/>
+          </a:fontRef>
+        </p:style>
+        <p:txBody>
+          <a:bodyPr rtlCol="0" anchor="ctr"/>
+          <a:lstStyle/>
+          <a:p>
+            <a:pPr algn="ctr"/>
+          </a:p>
+        </p:txBody>
+      </p:sp>
+      <p:sp>
+        <p:nvSpPr>
+          <p:cNvPr id="11" name="Rounded Rectangle 10"/>
+          <p:cNvSpPr/>
+          <p:nvPr/>
+        </p:nvSpPr>
+        <p:spPr>
+          <a:xfrm>
+            <a:off x="640080" y="2514600"/>
+            <a:ext cx="91440" cy="841248"/>
+          </a:xfrm>
+          <a:prstGeom prst="roundRect">
+            <a:avLst/>
+          </a:prstGeom>
+          <a:solidFill>
+            <a:srgbClr val="14B8A6"/>
+          </a:solidFill>
+          <a:ln>
+            <a:noFill/>
+          </a:ln>
+          <a:effectLst/>
+        </p:spPr>
+        <p:style>
+          <a:lnRef idx="1">
+            <a:schemeClr val="accent1"/>
+          </a:lnRef>
+          <a:fillRef idx="3">
+            <a:schemeClr val="accent1"/>
+          </a:fillRef>
+          <a:effectRef idx="2">
+            <a:schemeClr val="accent1"/>
+          </a:effectRef>
+          <a:fontRef idx="minor">
+            <a:schemeClr val="lt1"/>
+          </a:fontRef>
+        </p:style>
+        <p:txBody>
+          <a:bodyPr rtlCol="0" anchor="ctr"/>
+          <a:lstStyle/>
+          <a:p>
+            <a:pPr algn="ctr"/>
+          </a:p>
+        </p:txBody>
+      </p:sp>
+      <p:sp>
+        <p:nvSpPr>
+          <p:cNvPr id="12" name="TextBox 11"/>
+          <p:cNvSpPr txBox="1"/>
+          <p:nvPr/>
+        </p:nvSpPr>
+        <p:spPr>
+          <a:xfrm>
+            <a:off x="914400" y="2606040"/>
+            <a:ext cx="10241280" cy="365760"/>
+          </a:xfrm>
+          <a:prstGeom prst="rect">
+            <a:avLst/>
+          </a:prstGeom>
+          <a:noFill/>
+        </p:spPr>
+        <p:txBody>
+          <a:bodyPr wrap="square" anchor="t">
+            <a:spAutoFit/>
+          </a:bodyPr>
+          <a:lstStyle/>
+          <a:p>
+            <a:pPr algn="l"/>
+            <a:r>
+              <a:rPr sz="1500" b="1">
+                <a:solidFill>
+                  <a:srgbClr val="0F172A"/>
+                </a:solidFill>
+                <a:latin typeface="Calibri"/>
+              </a:rPr>
+              <a:t>2 · Route  (keyword  vs  semantic)</a:t>
+            </a:r>
+          </a:p>
+        </p:txBody>
+      </p:sp>
+      <p:sp>
+        <p:nvSpPr>
+          <p:cNvPr id="13" name="TextBox 12"/>
+          <p:cNvSpPr txBox="1"/>
+          <p:nvPr/>
+        </p:nvSpPr>
+        <p:spPr>
+          <a:xfrm>
+            <a:off x="914400" y="2935224"/>
+            <a:ext cx="10424160" cy="384048"/>
+          </a:xfrm>
+          <a:prstGeom prst="rect">
+            <a:avLst/>
+          </a:prstGeom>
+          <a:noFill/>
+        </p:spPr>
+        <p:txBody>
+          <a:bodyPr wrap="square" anchor="t">
+            <a:spAutoFit/>
+          </a:bodyPr>
+          <a:lstStyle/>
+          <a:p>
+            <a:pPr algn="l"/>
+            <a:r>
+              <a:rPr sz="1200" b="0">
+                <a:solidFill>
+                  <a:srgbClr val="475569"/>
+                </a:solidFill>
+                <a:latin typeface="Calibri"/>
+              </a:rPr>
+              <a:t>Clear question → auto-pick the strategy: short/acronym → keyword-leaning (BM25 / adaptive); long/conceptual → semantic (rerank / multi-query); vague wording → HyDE.</a:t>
+            </a:r>
+          </a:p>
+        </p:txBody>
+      </p:sp>
+      <p:sp>
+        <p:nvSpPr>
+          <p:cNvPr id="14" name="Rounded Rectangle 13"/>
+          <p:cNvSpPr/>
+          <p:nvPr/>
+        </p:nvSpPr>
+        <p:spPr>
+          <a:xfrm>
+            <a:off x="640080" y="3502152"/>
+            <a:ext cx="10908792" cy="841248"/>
+          </a:xfrm>
+          <a:prstGeom prst="roundRect">
+            <a:avLst/>
+          </a:prstGeom>
+          <a:solidFill>
+            <a:srgbClr val="F1F5F9"/>
+          </a:solidFill>
+          <a:ln>
+            <a:noFill/>
+          </a:ln>
+          <a:effectLst/>
+        </p:spPr>
+        <p:style>
+          <a:lnRef idx="1">
+            <a:schemeClr val="accent1"/>
+          </a:lnRef>
+          <a:fillRef idx="3">
+            <a:schemeClr val="accent1"/>
+          </a:fillRef>
+          <a:effectRef idx="2">
+            <a:schemeClr val="accent1"/>
+          </a:effectRef>
+          <a:fontRef idx="minor">
+            <a:schemeClr val="lt1"/>
+          </a:fontRef>
+        </p:style>
+        <p:txBody>
+          <a:bodyPr rtlCol="0" anchor="ctr"/>
+          <a:lstStyle/>
+          <a:p>
+            <a:pPr algn="ctr"/>
+          </a:p>
+        </p:txBody>
+      </p:sp>
+      <p:sp>
+        <p:nvSpPr>
+          <p:cNvPr id="15" name="Rounded Rectangle 14"/>
+          <p:cNvSpPr/>
+          <p:nvPr/>
+        </p:nvSpPr>
+        <p:spPr>
+          <a:xfrm>
+            <a:off x="640080" y="3502152"/>
+            <a:ext cx="91440" cy="841248"/>
+          </a:xfrm>
+          <a:prstGeom prst="roundRect">
+            <a:avLst/>
+          </a:prstGeom>
+          <a:solidFill>
+            <a:srgbClr val="2DD4BF"/>
+          </a:solidFill>
+          <a:ln>
+            <a:noFill/>
+          </a:ln>
+          <a:effectLst/>
+        </p:spPr>
+        <p:style>
+          <a:lnRef idx="1">
+            <a:schemeClr val="accent1"/>
+          </a:lnRef>
+          <a:fillRef idx="3">
+            <a:schemeClr val="accent1"/>
+          </a:fillRef>
+          <a:effectRef idx="2">
+            <a:schemeClr val="accent1"/>
+          </a:effectRef>
+          <a:fontRef idx="minor">
+            <a:schemeClr val="lt1"/>
+          </a:fontRef>
+        </p:style>
+        <p:txBody>
+          <a:bodyPr rtlCol="0" anchor="ctr"/>
+          <a:lstStyle/>
+          <a:p>
+            <a:pPr algn="ctr"/>
+          </a:p>
+        </p:txBody>
+      </p:sp>
+      <p:sp>
+        <p:nvSpPr>
+          <p:cNvPr id="16" name="TextBox 15"/>
+          <p:cNvSpPr txBox="1"/>
+          <p:nvPr/>
+        </p:nvSpPr>
+        <p:spPr>
+          <a:xfrm>
+            <a:off x="914400" y="3593592"/>
+            <a:ext cx="10241280" cy="365760"/>
+          </a:xfrm>
+          <a:prstGeom prst="rect">
+            <a:avLst/>
+          </a:prstGeom>
+          <a:noFill/>
+        </p:spPr>
+        <p:txBody>
+          <a:bodyPr wrap="square" anchor="t">
+            <a:spAutoFit/>
+          </a:bodyPr>
+          <a:lstStyle/>
+          <a:p>
+            <a:pPr algn="l"/>
+            <a:r>
+              <a:rPr sz="1500" b="1">
+                <a:solidFill>
+                  <a:srgbClr val="0F172A"/>
+                </a:solidFill>
+                <a:latin typeface="Calibri"/>
+              </a:rPr>
+              <a:t>3 · Clarify  (don't guess)</a:t>
+            </a:r>
+          </a:p>
+        </p:txBody>
+      </p:sp>
+      <p:sp>
+        <p:nvSpPr>
+          <p:cNvPr id="17" name="TextBox 16"/>
+          <p:cNvSpPr txBox="1"/>
+          <p:nvPr/>
+        </p:nvSpPr>
+        <p:spPr>
+          <a:xfrm>
+            <a:off x="914400" y="3922776"/>
+            <a:ext cx="10424160" cy="384048"/>
+          </a:xfrm>
+          <a:prstGeom prst="rect">
+            <a:avLst/>
+          </a:prstGeom>
+          <a:noFill/>
+        </p:spPr>
+        <p:txBody>
+          <a:bodyPr wrap="square" anchor="t">
+            <a:spAutoFit/>
+          </a:bodyPr>
+          <a:lstStyle/>
+          <a:p>
+            <a:pPr algn="l"/>
+            <a:r>
+              <a:rPr sz="1200" b="0">
+                <a:solidFill>
+                  <a:srgbClr val="475569"/>
+                </a:solidFill>
+                <a:latin typeface="Calibri"/>
+              </a:rPr>
+              <a:t>Too vague (“tell me about models”)? It asks 1–3 clarifying questions instead of retrieving noise and hallucinating an answer.</a:t>
+            </a:r>
+          </a:p>
+        </p:txBody>
+      </p:sp>
+      <p:sp>
+        <p:nvSpPr>
+          <p:cNvPr id="18" name="TextBox 17"/>
+          <p:cNvSpPr txBox="1"/>
+          <p:nvPr/>
+        </p:nvSpPr>
+        <p:spPr>
+          <a:xfrm>
+            <a:off x="9966960" y="3611880"/>
+            <a:ext cx="1463040" cy="310896"/>
+          </a:xfrm>
+          <a:prstGeom prst="rect">
+            <a:avLst/>
+          </a:prstGeom>
+          <a:noFill/>
+        </p:spPr>
+        <p:txBody>
+          <a:bodyPr wrap="square" anchor="t">
+            <a:spAutoFit/>
+          </a:bodyPr>
+          <a:lstStyle/>
+          <a:p>
+            <a:pPr algn="ctr"/>
+            <a:r>
+              <a:rPr sz="950" b="1">
+                <a:solidFill>
+                  <a:srgbClr val="FFFFFF"/>
+                </a:solidFill>
+                <a:latin typeface="Calibri"/>
+              </a:rPr>
+              <a:t>NEW</a:t>
+            </a:r>
+          </a:p>
+        </p:txBody>
+      </p:sp>
+      <p:sp>
+        <p:nvSpPr>
+          <p:cNvPr id="19" name="Rounded Rectangle 18"/>
+          <p:cNvSpPr/>
+          <p:nvPr/>
+        </p:nvSpPr>
+        <p:spPr>
+          <a:xfrm>
+            <a:off x="640080" y="4489704"/>
+            <a:ext cx="10908792" cy="822960"/>
+          </a:xfrm>
+          <a:prstGeom prst="roundRect">
+            <a:avLst/>
+          </a:prstGeom>
+          <a:solidFill>
+            <a:srgbClr val="F1F5F9"/>
+          </a:solidFill>
+          <a:ln>
+            <a:noFill/>
+          </a:ln>
+          <a:effectLst/>
+        </p:spPr>
+        <p:style>
+          <a:lnRef idx="1">
+            <a:schemeClr val="accent1"/>
+          </a:lnRef>
+          <a:fillRef idx="3">
+            <a:schemeClr val="accent1"/>
+          </a:fillRef>
+          <a:effectRef idx="2">
+            <a:schemeClr val="accent1"/>
+          </a:effectRef>
+          <a:fontRef idx="minor">
+            <a:schemeClr val="lt1"/>
+          </a:fontRef>
+        </p:style>
+        <p:txBody>
+          <a:bodyPr rtlCol="0" anchor="ctr"/>
+          <a:lstStyle/>
+          <a:p>
+            <a:pPr algn="ctr"/>
+          </a:p>
+        </p:txBody>
+      </p:sp>
+      <p:sp>
+        <p:nvSpPr>
+          <p:cNvPr id="20" name="Rounded Rectangle 19"/>
+          <p:cNvSpPr/>
+          <p:nvPr/>
+        </p:nvSpPr>
+        <p:spPr>
+          <a:xfrm>
+            <a:off x="640080" y="4489704"/>
+            <a:ext cx="91440" cy="822960"/>
+          </a:xfrm>
+          <a:prstGeom prst="roundRect">
+            <a:avLst/>
+          </a:prstGeom>
+          <a:solidFill>
+            <a:srgbClr val="1E293B"/>
+          </a:solidFill>
+          <a:ln>
+            <a:noFill/>
+          </a:ln>
+          <a:effectLst/>
+        </p:spPr>
+        <p:style>
+          <a:lnRef idx="1">
+            <a:schemeClr val="accent1"/>
+          </a:lnRef>
+          <a:fillRef idx="3">
+            <a:schemeClr val="accent1"/>
+          </a:fillRef>
+          <a:effectRef idx="2">
+            <a:schemeClr val="accent1"/>
+          </a:effectRef>
+          <a:fontRef idx="minor">
+            <a:schemeClr val="lt1"/>
+          </a:fontRef>
+        </p:style>
+        <p:txBody>
+          <a:bodyPr rtlCol="0" anchor="ctr"/>
+          <a:lstStyle/>
+          <a:p>
+            <a:pPr algn="ctr"/>
+          </a:p>
+        </p:txBody>
+      </p:sp>
+      <p:sp>
+        <p:nvSpPr>
+          <p:cNvPr id="21" name="TextBox 20"/>
+          <p:cNvSpPr txBox="1"/>
+          <p:nvPr/>
+        </p:nvSpPr>
+        <p:spPr>
+          <a:xfrm>
+            <a:off x="914400" y="4581144"/>
+            <a:ext cx="10241280" cy="365760"/>
+          </a:xfrm>
+          <a:prstGeom prst="rect">
+            <a:avLst/>
+          </a:prstGeom>
+          <a:noFill/>
+        </p:spPr>
+        <p:txBody>
+          <a:bodyPr wrap="square" anchor="t">
+            <a:spAutoFit/>
+          </a:bodyPr>
+          <a:lstStyle/>
+          <a:p>
+            <a:pPr algn="l"/>
+            <a:r>
+              <a:rPr sz="1500" b="1">
+                <a:solidFill>
+                  <a:srgbClr val="0F172A"/>
+                </a:solidFill>
+                <a:latin typeface="Calibri"/>
+              </a:rPr>
+              <a:t>Cheap, transparent, safe</a:t>
+            </a:r>
+          </a:p>
+        </p:txBody>
+      </p:sp>
+      <p:sp>
+        <p:nvSpPr>
+          <p:cNvPr id="22" name="TextBox 21"/>
+          <p:cNvSpPr txBox="1"/>
+          <p:nvPr/>
+        </p:nvSpPr>
+        <p:spPr>
+          <a:xfrm>
+            <a:off x="914400" y="4910328"/>
+            <a:ext cx="10424160" cy="365760"/>
+          </a:xfrm>
+          <a:prstGeom prst="rect">
+            <a:avLst/>
+          </a:prstGeom>
+          <a:noFill/>
+        </p:spPr>
+        <p:txBody>
+          <a:bodyPr wrap="square" anchor="t">
+            <a:spAutoFit/>
+          </a:bodyPr>
+          <a:lstStyle/>
+          <a:p>
+            <a:pPr algn="l"/>
+            <a:r>
+              <a:rPr sz="1200" b="0">
+                <a:solidFill>
+                  <a:srgbClr val="475569"/>
+                </a:solidFill>
+                <a:latin typeface="Calibri"/>
+              </a:rPr>
+              <a:t>One haiku call (≈$0); appears in every answer's trace as “0 · Analyze query”; and fails open — any gate error just proceeds as a normal clear question.</a:t>
+            </a:r>
+          </a:p>
+        </p:txBody>
+      </p:sp>
+      <p:sp>
+        <p:nvSpPr>
+          <p:cNvPr id="23" name="TextBox 22"/>
+          <p:cNvSpPr txBox="1"/>
+          <p:nvPr/>
+        </p:nvSpPr>
+        <p:spPr>
+          <a:xfrm>
+            <a:off x="11430000" y="6400800"/>
+            <a:ext cx="457200" cy="274320"/>
+          </a:xfrm>
+          <a:prstGeom prst="rect">
+            <a:avLst/>
+          </a:prstGeom>
+          <a:noFill/>
+        </p:spPr>
+        <p:txBody>
+          <a:bodyPr wrap="square" anchor="t">
+            <a:spAutoFit/>
+          </a:bodyPr>
+          <a:lstStyle/>
+          <a:p>
+            <a:pPr algn="l"/>
+            <a:r>
+              <a:rPr sz="1100" b="0">
+                <a:solidFill>
+                  <a:srgbClr val="64748B"/>
+                </a:solidFill>
+                <a:latin typeface="Calibri"/>
+              </a:rPr>
+              <a:t>10</a:t>
+            </a:r>
           </a:p>
         </p:txBody>
       </p:sp>
@@ -8367,6 +10477,10 @@
           </a:solidFill>
           <a:ln/>
         </p:spPr>
+        <p:txBody>
+          <a:bodyPr/>
+          <a:p/>
+        </p:txBody>
       </p:sp>
       <p:pic>
         <p:nvPicPr>
@@ -8542,6 +10656,10 @@
           </a:solidFill>
           <a:ln/>
         </p:spPr>
+        <p:txBody>
+          <a:bodyPr/>
+          <a:p/>
+        </p:txBody>
       </p:sp>
       <p:sp>
         <p:nvSpPr>
@@ -8640,6 +10758,10 @@
           </a:solidFill>
           <a:ln/>
         </p:spPr>
+        <p:txBody>
+          <a:bodyPr/>
+          <a:p/>
+        </p:txBody>
       </p:sp>
       <p:sp>
         <p:nvSpPr>
@@ -8738,6 +10860,10 @@
           </a:solidFill>
           <a:ln/>
         </p:spPr>
+        <p:txBody>
+          <a:bodyPr/>
+          <a:p/>
+        </p:txBody>
       </p:sp>
       <p:sp>
         <p:nvSpPr>
@@ -8850,6 +10976,10 @@
             </a:outerShdw>
           </a:effectLst>
         </p:spPr>
+        <p:txBody>
+          <a:bodyPr/>
+          <a:p/>
+        </p:txBody>
       </p:sp>
       <p:pic>
         <p:nvPicPr>
@@ -9028,6 +11158,1850 @@
               <a:t>2</a:t>
             </a:r>
             <a:endParaRPr lang="en-US" sz="1000" dirty="0"/>
+          </a:p>
+        </p:txBody>
+      </p:sp>
+    </p:spTree>
+  </p:cSld>
+  <p:clrMapOvr>
+    <a:masterClrMapping/>
+  </p:clrMapOvr>
+</p:sld>
+</file>
+
+<file path=ppt/slides/slide20.xml><?xml version="1.0" encoding="utf-8"?>
+<p:sld xmlns:a="http://schemas.openxmlformats.org/drawingml/2006/main" xmlns:p="http://schemas.openxmlformats.org/presentationml/2006/main" xmlns:r="http://schemas.openxmlformats.org/officeDocument/2006/relationships">
+  <p:cSld>
+    <p:spTree>
+      <p:nvGrpSpPr>
+        <p:cNvPr id="1" name=""/>
+        <p:cNvGrpSpPr/>
+        <p:nvPr/>
+      </p:nvGrpSpPr>
+      <p:grpSpPr/>
+      <p:sp>
+        <p:nvSpPr>
+          <p:cNvPr id="2" name="Rectangle 1"/>
+          <p:cNvSpPr/>
+          <p:nvPr/>
+        </p:nvSpPr>
+        <p:spPr>
+          <a:xfrm>
+            <a:off x="0" y="0"/>
+            <a:ext cx="12192000" cy="6858000"/>
+          </a:xfrm>
+          <a:prstGeom prst="rect">
+            <a:avLst/>
+          </a:prstGeom>
+          <a:solidFill>
+            <a:srgbClr val="FFFFFF"/>
+          </a:solidFill>
+          <a:ln>
+            <a:noFill/>
+          </a:ln>
+          <a:effectLst/>
+        </p:spPr>
+        <p:style>
+          <a:lnRef idx="1">
+            <a:schemeClr val="accent1"/>
+          </a:lnRef>
+          <a:fillRef idx="3">
+            <a:schemeClr val="accent1"/>
+          </a:fillRef>
+          <a:effectRef idx="2">
+            <a:schemeClr val="accent1"/>
+          </a:effectRef>
+          <a:fontRef idx="minor">
+            <a:schemeClr val="lt1"/>
+          </a:fontRef>
+        </p:style>
+        <p:txBody>
+          <a:bodyPr rtlCol="0" anchor="ctr"/>
+          <a:lstStyle/>
+          <a:p>
+            <a:pPr algn="ctr"/>
+          </a:p>
+        </p:txBody>
+      </p:sp>
+      <p:sp>
+        <p:nvSpPr>
+          <p:cNvPr id="3" name="Rounded Rectangle 2"/>
+          <p:cNvSpPr/>
+          <p:nvPr/>
+        </p:nvSpPr>
+        <p:spPr>
+          <a:xfrm>
+            <a:off x="548640" y="411480"/>
+            <a:ext cx="566928" cy="566928"/>
+          </a:xfrm>
+          <a:prstGeom prst="roundRect">
+            <a:avLst/>
+          </a:prstGeom>
+          <a:solidFill>
+            <a:srgbClr val="14B8A6"/>
+          </a:solidFill>
+          <a:ln>
+            <a:noFill/>
+          </a:ln>
+          <a:effectLst/>
+        </p:spPr>
+        <p:style>
+          <a:lnRef idx="1">
+            <a:schemeClr val="accent1"/>
+          </a:lnRef>
+          <a:fillRef idx="3">
+            <a:schemeClr val="accent1"/>
+          </a:fillRef>
+          <a:effectRef idx="2">
+            <a:schemeClr val="accent1"/>
+          </a:effectRef>
+          <a:fontRef idx="minor">
+            <a:schemeClr val="lt1"/>
+          </a:fontRef>
+        </p:style>
+        <p:txBody>
+          <a:bodyPr rtlCol="0" anchor="ctr"/>
+          <a:lstStyle/>
+          <a:p>
+            <a:pPr algn="ctr"/>
+          </a:p>
+        </p:txBody>
+      </p:sp>
+      <p:sp>
+        <p:nvSpPr>
+          <p:cNvPr id="4" name="TextBox 3"/>
+          <p:cNvSpPr txBox="1"/>
+          <p:nvPr/>
+        </p:nvSpPr>
+        <p:spPr>
+          <a:xfrm>
+            <a:off x="1280160" y="365760"/>
+            <a:ext cx="10332720" cy="640080"/>
+          </a:xfrm>
+          <a:prstGeom prst="rect">
+            <a:avLst/>
+          </a:prstGeom>
+          <a:noFill/>
+        </p:spPr>
+        <p:txBody>
+          <a:bodyPr wrap="square" anchor="t">
+            <a:spAutoFit/>
+          </a:bodyPr>
+          <a:lstStyle/>
+          <a:p>
+            <a:pPr algn="l"/>
+            <a:r>
+              <a:rPr sz="2800" b="1">
+                <a:solidFill>
+                  <a:srgbClr val="0F172A"/>
+                </a:solidFill>
+                <a:latin typeface="Calibri"/>
+              </a:rPr>
+              <a:t>Built for Transparency — mentor feedback → response</a:t>
+            </a:r>
+          </a:p>
+        </p:txBody>
+      </p:sp>
+      <p:sp>
+        <p:nvSpPr>
+          <p:cNvPr id="5" name="TextBox 4"/>
+          <p:cNvSpPr txBox="1"/>
+          <p:nvPr/>
+        </p:nvSpPr>
+        <p:spPr>
+          <a:xfrm>
+            <a:off x="1298448" y="969264"/>
+            <a:ext cx="10332720" cy="457200"/>
+          </a:xfrm>
+          <a:prstGeom prst="rect">
+            <a:avLst/>
+          </a:prstGeom>
+          <a:noFill/>
+        </p:spPr>
+        <p:txBody>
+          <a:bodyPr wrap="square" anchor="t">
+            <a:spAutoFit/>
+          </a:bodyPr>
+          <a:lstStyle/>
+          <a:p>
+            <a:pPr algn="l"/>
+            <a:r>
+              <a:rPr sz="1400" b="0">
+                <a:solidFill>
+                  <a:srgbClr val="475569"/>
+                </a:solidFill>
+                <a:latin typeface="Calibri"/>
+              </a:rPr>
+              <a:t>Every piece of feedback became a visible feature. The app itself is the proof.</a:t>
+            </a:r>
+          </a:p>
+        </p:txBody>
+      </p:sp>
+      <p:sp>
+        <p:nvSpPr>
+          <p:cNvPr id="6" name="Rounded Rectangle 5"/>
+          <p:cNvSpPr/>
+          <p:nvPr/>
+        </p:nvSpPr>
+        <p:spPr>
+          <a:xfrm>
+            <a:off x="640080" y="1536192"/>
+            <a:ext cx="10908792" cy="658368"/>
+          </a:xfrm>
+          <a:prstGeom prst="roundRect">
+            <a:avLst/>
+          </a:prstGeom>
+          <a:solidFill>
+            <a:srgbClr val="F1F5F9"/>
+          </a:solidFill>
+          <a:ln>
+            <a:noFill/>
+          </a:ln>
+          <a:effectLst/>
+        </p:spPr>
+        <p:style>
+          <a:lnRef idx="1">
+            <a:schemeClr val="accent1"/>
+          </a:lnRef>
+          <a:fillRef idx="3">
+            <a:schemeClr val="accent1"/>
+          </a:fillRef>
+          <a:effectRef idx="2">
+            <a:schemeClr val="accent1"/>
+          </a:effectRef>
+          <a:fontRef idx="minor">
+            <a:schemeClr val="lt1"/>
+          </a:fontRef>
+        </p:style>
+        <p:txBody>
+          <a:bodyPr rtlCol="0" anchor="ctr"/>
+          <a:lstStyle/>
+          <a:p>
+            <a:pPr algn="ctr"/>
+          </a:p>
+        </p:txBody>
+      </p:sp>
+      <p:sp>
+        <p:nvSpPr>
+          <p:cNvPr id="7" name="Rounded Rectangle 6"/>
+          <p:cNvSpPr/>
+          <p:nvPr/>
+        </p:nvSpPr>
+        <p:spPr>
+          <a:xfrm>
+            <a:off x="640080" y="1536192"/>
+            <a:ext cx="91440" cy="658368"/>
+          </a:xfrm>
+          <a:prstGeom prst="roundRect">
+            <a:avLst/>
+          </a:prstGeom>
+          <a:solidFill>
+            <a:srgbClr val="14B8A6"/>
+          </a:solidFill>
+          <a:ln>
+            <a:noFill/>
+          </a:ln>
+          <a:effectLst/>
+        </p:spPr>
+        <p:style>
+          <a:lnRef idx="1">
+            <a:schemeClr val="accent1"/>
+          </a:lnRef>
+          <a:fillRef idx="3">
+            <a:schemeClr val="accent1"/>
+          </a:fillRef>
+          <a:effectRef idx="2">
+            <a:schemeClr val="accent1"/>
+          </a:effectRef>
+          <a:fontRef idx="minor">
+            <a:schemeClr val="lt1"/>
+          </a:fontRef>
+        </p:style>
+        <p:txBody>
+          <a:bodyPr rtlCol="0" anchor="ctr"/>
+          <a:lstStyle/>
+          <a:p>
+            <a:pPr algn="ctr"/>
+          </a:p>
+        </p:txBody>
+      </p:sp>
+      <p:sp>
+        <p:nvSpPr>
+          <p:cNvPr id="8" name="TextBox 7"/>
+          <p:cNvSpPr txBox="1"/>
+          <p:nvPr/>
+        </p:nvSpPr>
+        <p:spPr>
+          <a:xfrm>
+            <a:off x="914400" y="1627632"/>
+            <a:ext cx="10241280" cy="365760"/>
+          </a:xfrm>
+          <a:prstGeom prst="rect">
+            <a:avLst/>
+          </a:prstGeom>
+          <a:noFill/>
+        </p:spPr>
+        <p:txBody>
+          <a:bodyPr wrap="square" anchor="t">
+            <a:spAutoFit/>
+          </a:bodyPr>
+          <a:lstStyle/>
+          <a:p>
+            <a:pPr algn="l"/>
+            <a:r>
+              <a:rPr sz="1500" b="1">
+                <a:solidFill>
+                  <a:srgbClr val="0F172A"/>
+                </a:solidFill>
+                <a:latin typeface="Calibri"/>
+              </a:rPr>
+              <a:t>“Why Chroma DB?”</a:t>
+            </a:r>
+          </a:p>
+        </p:txBody>
+      </p:sp>
+      <p:sp>
+        <p:nvSpPr>
+          <p:cNvPr id="9" name="TextBox 8"/>
+          <p:cNvSpPr txBox="1"/>
+          <p:nvPr/>
+        </p:nvSpPr>
+        <p:spPr>
+          <a:xfrm>
+            <a:off x="914400" y="1956816"/>
+            <a:ext cx="10424160" cy="201167"/>
+          </a:xfrm>
+          <a:prstGeom prst="rect">
+            <a:avLst/>
+          </a:prstGeom>
+          <a:noFill/>
+        </p:spPr>
+        <p:txBody>
+          <a:bodyPr wrap="square" anchor="t">
+            <a:spAutoFit/>
+          </a:bodyPr>
+          <a:lstStyle/>
+          <a:p>
+            <a:pPr algn="l"/>
+            <a:r>
+              <a:rPr sz="1200" b="0">
+                <a:solidFill>
+                  <a:srgbClr val="475569"/>
+                </a:solidFill>
+                <a:latin typeface="Calibri"/>
+              </a:rPr>
+              <a:t>A dedicated rationale + comparison (embedded, zero-ops, one collection per embedding) vs FAISS / pgvector / Pinecone / Elasticsearch — in the Stack tile and the How-it-Works FAQ.</a:t>
+            </a:r>
+          </a:p>
+        </p:txBody>
+      </p:sp>
+      <p:sp>
+        <p:nvSpPr>
+          <p:cNvPr id="10" name="Rounded Rectangle 9"/>
+          <p:cNvSpPr/>
+          <p:nvPr/>
+        </p:nvSpPr>
+        <p:spPr>
+          <a:xfrm>
+            <a:off x="640080" y="2340864"/>
+            <a:ext cx="10908792" cy="658368"/>
+          </a:xfrm>
+          <a:prstGeom prst="roundRect">
+            <a:avLst/>
+          </a:prstGeom>
+          <a:solidFill>
+            <a:srgbClr val="F1F5F9"/>
+          </a:solidFill>
+          <a:ln>
+            <a:noFill/>
+          </a:ln>
+          <a:effectLst/>
+        </p:spPr>
+        <p:style>
+          <a:lnRef idx="1">
+            <a:schemeClr val="accent1"/>
+          </a:lnRef>
+          <a:fillRef idx="3">
+            <a:schemeClr val="accent1"/>
+          </a:fillRef>
+          <a:effectRef idx="2">
+            <a:schemeClr val="accent1"/>
+          </a:effectRef>
+          <a:fontRef idx="minor">
+            <a:schemeClr val="lt1"/>
+          </a:fontRef>
+        </p:style>
+        <p:txBody>
+          <a:bodyPr rtlCol="0" anchor="ctr"/>
+          <a:lstStyle/>
+          <a:p>
+            <a:pPr algn="ctr"/>
+          </a:p>
+        </p:txBody>
+      </p:sp>
+      <p:sp>
+        <p:nvSpPr>
+          <p:cNvPr id="11" name="Rounded Rectangle 10"/>
+          <p:cNvSpPr/>
+          <p:nvPr/>
+        </p:nvSpPr>
+        <p:spPr>
+          <a:xfrm>
+            <a:off x="640080" y="2340864"/>
+            <a:ext cx="91440" cy="658368"/>
+          </a:xfrm>
+          <a:prstGeom prst="roundRect">
+            <a:avLst/>
+          </a:prstGeom>
+          <a:solidFill>
+            <a:srgbClr val="14B8A6"/>
+          </a:solidFill>
+          <a:ln>
+            <a:noFill/>
+          </a:ln>
+          <a:effectLst/>
+        </p:spPr>
+        <p:style>
+          <a:lnRef idx="1">
+            <a:schemeClr val="accent1"/>
+          </a:lnRef>
+          <a:fillRef idx="3">
+            <a:schemeClr val="accent1"/>
+          </a:fillRef>
+          <a:effectRef idx="2">
+            <a:schemeClr val="accent1"/>
+          </a:effectRef>
+          <a:fontRef idx="minor">
+            <a:schemeClr val="lt1"/>
+          </a:fontRef>
+        </p:style>
+        <p:txBody>
+          <a:bodyPr rtlCol="0" anchor="ctr"/>
+          <a:lstStyle/>
+          <a:p>
+            <a:pPr algn="ctr"/>
+          </a:p>
+        </p:txBody>
+      </p:sp>
+      <p:sp>
+        <p:nvSpPr>
+          <p:cNvPr id="12" name="TextBox 11"/>
+          <p:cNvSpPr txBox="1"/>
+          <p:nvPr/>
+        </p:nvSpPr>
+        <p:spPr>
+          <a:xfrm>
+            <a:off x="914400" y="2432304"/>
+            <a:ext cx="10241280" cy="365760"/>
+          </a:xfrm>
+          <a:prstGeom prst="rect">
+            <a:avLst/>
+          </a:prstGeom>
+          <a:noFill/>
+        </p:spPr>
+        <p:txBody>
+          <a:bodyPr wrap="square" anchor="t">
+            <a:spAutoFit/>
+          </a:bodyPr>
+          <a:lstStyle/>
+          <a:p>
+            <a:pPr algn="l"/>
+            <a:r>
+              <a:rPr sz="1500" b="1">
+                <a:solidFill>
+                  <a:srgbClr val="0F172A"/>
+                </a:solidFill>
+                <a:latin typeface="Calibri"/>
+              </a:rPr>
+              <a:t>Metadata &amp; source referencing</a:t>
+            </a:r>
+          </a:p>
+        </p:txBody>
+      </p:sp>
+      <p:sp>
+        <p:nvSpPr>
+          <p:cNvPr id="13" name="TextBox 12"/>
+          <p:cNvSpPr txBox="1"/>
+          <p:nvPr/>
+        </p:nvSpPr>
+        <p:spPr>
+          <a:xfrm>
+            <a:off x="914400" y="2761488"/>
+            <a:ext cx="10424160" cy="201167"/>
+          </a:xfrm>
+          <a:prstGeom prst="rect">
+            <a:avLst/>
+          </a:prstGeom>
+          <a:noFill/>
+        </p:spPr>
+        <p:txBody>
+          <a:bodyPr wrap="square" anchor="t">
+            <a:spAutoFit/>
+          </a:bodyPr>
+          <a:lstStyle/>
+          <a:p>
+            <a:pPr algn="l"/>
+            <a:r>
+              <a:rPr sz="1200" b="0">
+                <a:solidFill>
+                  <a:srgbClr val="475569"/>
+                </a:solidFill>
+                <a:latin typeface="Calibri"/>
+              </a:rPr>
+              <a:t>Enriched citations on every answer: title · authors+year · page · relevance score · a “View PDF” link that opens the paper at the exact page.</a:t>
+            </a:r>
+          </a:p>
+        </p:txBody>
+      </p:sp>
+      <p:sp>
+        <p:nvSpPr>
+          <p:cNvPr id="14" name="Rounded Rectangle 13"/>
+          <p:cNvSpPr/>
+          <p:nvPr/>
+        </p:nvSpPr>
+        <p:spPr>
+          <a:xfrm>
+            <a:off x="640080" y="3145536"/>
+            <a:ext cx="10908792" cy="658368"/>
+          </a:xfrm>
+          <a:prstGeom prst="roundRect">
+            <a:avLst/>
+          </a:prstGeom>
+          <a:solidFill>
+            <a:srgbClr val="F1F5F9"/>
+          </a:solidFill>
+          <a:ln>
+            <a:noFill/>
+          </a:ln>
+          <a:effectLst/>
+        </p:spPr>
+        <p:style>
+          <a:lnRef idx="1">
+            <a:schemeClr val="accent1"/>
+          </a:lnRef>
+          <a:fillRef idx="3">
+            <a:schemeClr val="accent1"/>
+          </a:fillRef>
+          <a:effectRef idx="2">
+            <a:schemeClr val="accent1"/>
+          </a:effectRef>
+          <a:fontRef idx="minor">
+            <a:schemeClr val="lt1"/>
+          </a:fontRef>
+        </p:style>
+        <p:txBody>
+          <a:bodyPr rtlCol="0" anchor="ctr"/>
+          <a:lstStyle/>
+          <a:p>
+            <a:pPr algn="ctr"/>
+          </a:p>
+        </p:txBody>
+      </p:sp>
+      <p:sp>
+        <p:nvSpPr>
+          <p:cNvPr id="15" name="Rounded Rectangle 14"/>
+          <p:cNvSpPr/>
+          <p:nvPr/>
+        </p:nvSpPr>
+        <p:spPr>
+          <a:xfrm>
+            <a:off x="640080" y="3145536"/>
+            <a:ext cx="91440" cy="658368"/>
+          </a:xfrm>
+          <a:prstGeom prst="roundRect">
+            <a:avLst/>
+          </a:prstGeom>
+          <a:solidFill>
+            <a:srgbClr val="14B8A6"/>
+          </a:solidFill>
+          <a:ln>
+            <a:noFill/>
+          </a:ln>
+          <a:effectLst/>
+        </p:spPr>
+        <p:style>
+          <a:lnRef idx="1">
+            <a:schemeClr val="accent1"/>
+          </a:lnRef>
+          <a:fillRef idx="3">
+            <a:schemeClr val="accent1"/>
+          </a:fillRef>
+          <a:effectRef idx="2">
+            <a:schemeClr val="accent1"/>
+          </a:effectRef>
+          <a:fontRef idx="minor">
+            <a:schemeClr val="lt1"/>
+          </a:fontRef>
+        </p:style>
+        <p:txBody>
+          <a:bodyPr rtlCol="0" anchor="ctr"/>
+          <a:lstStyle/>
+          <a:p>
+            <a:pPr algn="ctr"/>
+          </a:p>
+        </p:txBody>
+      </p:sp>
+      <p:sp>
+        <p:nvSpPr>
+          <p:cNvPr id="16" name="TextBox 15"/>
+          <p:cNvSpPr txBox="1"/>
+          <p:nvPr/>
+        </p:nvSpPr>
+        <p:spPr>
+          <a:xfrm>
+            <a:off x="914400" y="3236976"/>
+            <a:ext cx="10241280" cy="365760"/>
+          </a:xfrm>
+          <a:prstGeom prst="rect">
+            <a:avLst/>
+          </a:prstGeom>
+          <a:noFill/>
+        </p:spPr>
+        <p:txBody>
+          <a:bodyPr wrap="square" anchor="t">
+            <a:spAutoFit/>
+          </a:bodyPr>
+          <a:lstStyle/>
+          <a:p>
+            <a:pPr algn="l"/>
+            <a:r>
+              <a:rPr sz="1500" b="1">
+                <a:solidFill>
+                  <a:srgbClr val="0F172A"/>
+                </a:solidFill>
+                <a:latin typeface="Calibri"/>
+              </a:rPr>
+              <a:t>“Your own &amp; more strategies”</a:t>
+            </a:r>
+          </a:p>
+        </p:txBody>
+      </p:sp>
+      <p:sp>
+        <p:nvSpPr>
+          <p:cNvPr id="17" name="TextBox 16"/>
+          <p:cNvSpPr txBox="1"/>
+          <p:nvPr/>
+        </p:nvSpPr>
+        <p:spPr>
+          <a:xfrm>
+            <a:off x="914400" y="3566160"/>
+            <a:ext cx="10424160" cy="201167"/>
+          </a:xfrm>
+          <a:prstGeom prst="rect">
+            <a:avLst/>
+          </a:prstGeom>
+          <a:noFill/>
+        </p:spPr>
+        <p:txBody>
+          <a:bodyPr wrap="square" anchor="t">
+            <a:spAutoFit/>
+          </a:bodyPr>
+          <a:lstStyle/>
+          <a:p>
+            <a:pPr algn="l"/>
+            <a:r>
+              <a:rPr sz="1200" b="0">
+                <a:solidFill>
+                  <a:srgbClr val="475569"/>
+                </a:solidFill>
+                <a:latin typeface="Calibri"/>
+              </a:rPr>
+              <a:t>Seven strategies incl. our Adaptive Hybrid, plus Auto smart-routing and the pre-RAG query gate (keyword-vs-vector by prompt quality).</a:t>
+            </a:r>
+          </a:p>
+        </p:txBody>
+      </p:sp>
+      <p:sp>
+        <p:nvSpPr>
+          <p:cNvPr id="18" name="Rounded Rectangle 17"/>
+          <p:cNvSpPr/>
+          <p:nvPr/>
+        </p:nvSpPr>
+        <p:spPr>
+          <a:xfrm>
+            <a:off x="640080" y="3950208"/>
+            <a:ext cx="10908792" cy="658368"/>
+          </a:xfrm>
+          <a:prstGeom prst="roundRect">
+            <a:avLst/>
+          </a:prstGeom>
+          <a:solidFill>
+            <a:srgbClr val="F1F5F9"/>
+          </a:solidFill>
+          <a:ln>
+            <a:noFill/>
+          </a:ln>
+          <a:effectLst/>
+        </p:spPr>
+        <p:style>
+          <a:lnRef idx="1">
+            <a:schemeClr val="accent1"/>
+          </a:lnRef>
+          <a:fillRef idx="3">
+            <a:schemeClr val="accent1"/>
+          </a:fillRef>
+          <a:effectRef idx="2">
+            <a:schemeClr val="accent1"/>
+          </a:effectRef>
+          <a:fontRef idx="minor">
+            <a:schemeClr val="lt1"/>
+          </a:fontRef>
+        </p:style>
+        <p:txBody>
+          <a:bodyPr rtlCol="0" anchor="ctr"/>
+          <a:lstStyle/>
+          <a:p>
+            <a:pPr algn="ctr"/>
+          </a:p>
+        </p:txBody>
+      </p:sp>
+      <p:sp>
+        <p:nvSpPr>
+          <p:cNvPr id="19" name="Rounded Rectangle 18"/>
+          <p:cNvSpPr/>
+          <p:nvPr/>
+        </p:nvSpPr>
+        <p:spPr>
+          <a:xfrm>
+            <a:off x="640080" y="3950208"/>
+            <a:ext cx="91440" cy="658368"/>
+          </a:xfrm>
+          <a:prstGeom prst="roundRect">
+            <a:avLst/>
+          </a:prstGeom>
+          <a:solidFill>
+            <a:srgbClr val="14B8A6"/>
+          </a:solidFill>
+          <a:ln>
+            <a:noFill/>
+          </a:ln>
+          <a:effectLst/>
+        </p:spPr>
+        <p:style>
+          <a:lnRef idx="1">
+            <a:schemeClr val="accent1"/>
+          </a:lnRef>
+          <a:fillRef idx="3">
+            <a:schemeClr val="accent1"/>
+          </a:fillRef>
+          <a:effectRef idx="2">
+            <a:schemeClr val="accent1"/>
+          </a:effectRef>
+          <a:fontRef idx="minor">
+            <a:schemeClr val="lt1"/>
+          </a:fontRef>
+        </p:style>
+        <p:txBody>
+          <a:bodyPr rtlCol="0" anchor="ctr"/>
+          <a:lstStyle/>
+          <a:p>
+            <a:pPr algn="ctr"/>
+          </a:p>
+        </p:txBody>
+      </p:sp>
+      <p:sp>
+        <p:nvSpPr>
+          <p:cNvPr id="20" name="TextBox 19"/>
+          <p:cNvSpPr txBox="1"/>
+          <p:nvPr/>
+        </p:nvSpPr>
+        <p:spPr>
+          <a:xfrm>
+            <a:off x="914400" y="4041648"/>
+            <a:ext cx="10241280" cy="365760"/>
+          </a:xfrm>
+          <a:prstGeom prst="rect">
+            <a:avLst/>
+          </a:prstGeom>
+          <a:noFill/>
+        </p:spPr>
+        <p:txBody>
+          <a:bodyPr wrap="square" anchor="t">
+            <a:spAutoFit/>
+          </a:bodyPr>
+          <a:lstStyle/>
+          <a:p>
+            <a:pPr algn="l"/>
+            <a:r>
+              <a:rPr sz="1500" b="1">
+                <a:solidFill>
+                  <a:srgbClr val="0F172A"/>
+                </a:solidFill>
+                <a:latin typeface="Calibri"/>
+              </a:rPr>
+              <a:t>Condense text / “How it works”</a:t>
+            </a:r>
+          </a:p>
+        </p:txBody>
+      </p:sp>
+      <p:sp>
+        <p:nvSpPr>
+          <p:cNvPr id="21" name="TextBox 20"/>
+          <p:cNvSpPr txBox="1"/>
+          <p:nvPr/>
+        </p:nvSpPr>
+        <p:spPr>
+          <a:xfrm>
+            <a:off x="914400" y="4370832"/>
+            <a:ext cx="10424160" cy="201167"/>
+          </a:xfrm>
+          <a:prstGeom prst="rect">
+            <a:avLst/>
+          </a:prstGeom>
+          <a:noFill/>
+        </p:spPr>
+        <p:txBody>
+          <a:bodyPr wrap="square" anchor="t">
+            <a:spAutoFit/>
+          </a:bodyPr>
+          <a:lstStyle/>
+          <a:p>
+            <a:pPr algn="l"/>
+            <a:r>
+              <a:rPr sz="1200" b="0">
+                <a:solidFill>
+                  <a:srgbClr val="475569"/>
+                </a:solidFill>
+                <a:latin typeface="Calibri"/>
+              </a:rPr>
+              <a:t>Rebuilt as an architecture diagram + design-rationale FAQ + (?) help tooltips + collapsible prompts, and clickable Stack tiles that open how/why detail modals.</a:t>
+            </a:r>
+          </a:p>
+        </p:txBody>
+      </p:sp>
+      <p:sp>
+        <p:nvSpPr>
+          <p:cNvPr id="22" name="Rounded Rectangle 21"/>
+          <p:cNvSpPr/>
+          <p:nvPr/>
+        </p:nvSpPr>
+        <p:spPr>
+          <a:xfrm>
+            <a:off x="640080" y="4754880"/>
+            <a:ext cx="10908792" cy="658368"/>
+          </a:xfrm>
+          <a:prstGeom prst="roundRect">
+            <a:avLst/>
+          </a:prstGeom>
+          <a:solidFill>
+            <a:srgbClr val="F1F5F9"/>
+          </a:solidFill>
+          <a:ln>
+            <a:noFill/>
+          </a:ln>
+          <a:effectLst/>
+        </p:spPr>
+        <p:style>
+          <a:lnRef idx="1">
+            <a:schemeClr val="accent1"/>
+          </a:lnRef>
+          <a:fillRef idx="3">
+            <a:schemeClr val="accent1"/>
+          </a:fillRef>
+          <a:effectRef idx="2">
+            <a:schemeClr val="accent1"/>
+          </a:effectRef>
+          <a:fontRef idx="minor">
+            <a:schemeClr val="lt1"/>
+          </a:fontRef>
+        </p:style>
+        <p:txBody>
+          <a:bodyPr rtlCol="0" anchor="ctr"/>
+          <a:lstStyle/>
+          <a:p>
+            <a:pPr algn="ctr"/>
+          </a:p>
+        </p:txBody>
+      </p:sp>
+      <p:sp>
+        <p:nvSpPr>
+          <p:cNvPr id="23" name="Rounded Rectangle 22"/>
+          <p:cNvSpPr/>
+          <p:nvPr/>
+        </p:nvSpPr>
+        <p:spPr>
+          <a:xfrm>
+            <a:off x="640080" y="4754880"/>
+            <a:ext cx="91440" cy="658368"/>
+          </a:xfrm>
+          <a:prstGeom prst="roundRect">
+            <a:avLst/>
+          </a:prstGeom>
+          <a:solidFill>
+            <a:srgbClr val="14B8A6"/>
+          </a:solidFill>
+          <a:ln>
+            <a:noFill/>
+          </a:ln>
+          <a:effectLst/>
+        </p:spPr>
+        <p:style>
+          <a:lnRef idx="1">
+            <a:schemeClr val="accent1"/>
+          </a:lnRef>
+          <a:fillRef idx="3">
+            <a:schemeClr val="accent1"/>
+          </a:fillRef>
+          <a:effectRef idx="2">
+            <a:schemeClr val="accent1"/>
+          </a:effectRef>
+          <a:fontRef idx="minor">
+            <a:schemeClr val="lt1"/>
+          </a:fontRef>
+        </p:style>
+        <p:txBody>
+          <a:bodyPr rtlCol="0" anchor="ctr"/>
+          <a:lstStyle/>
+          <a:p>
+            <a:pPr algn="ctr"/>
+          </a:p>
+        </p:txBody>
+      </p:sp>
+      <p:sp>
+        <p:nvSpPr>
+          <p:cNvPr id="24" name="TextBox 23"/>
+          <p:cNvSpPr txBox="1"/>
+          <p:nvPr/>
+        </p:nvSpPr>
+        <p:spPr>
+          <a:xfrm>
+            <a:off x="914400" y="4846320"/>
+            <a:ext cx="10241280" cy="365760"/>
+          </a:xfrm>
+          <a:prstGeom prst="rect">
+            <a:avLst/>
+          </a:prstGeom>
+          <a:noFill/>
+        </p:spPr>
+        <p:txBody>
+          <a:bodyPr wrap="square" anchor="t">
+            <a:spAutoFit/>
+          </a:bodyPr>
+          <a:lstStyle/>
+          <a:p>
+            <a:pPr algn="l"/>
+            <a:r>
+              <a:rPr sz="1500" b="1">
+                <a:solidFill>
+                  <a:srgbClr val="0F172A"/>
+                </a:solidFill>
+                <a:latin typeface="Calibri"/>
+              </a:rPr>
+              <a:t>Web-search fallback</a:t>
+            </a:r>
+          </a:p>
+        </p:txBody>
+      </p:sp>
+      <p:sp>
+        <p:nvSpPr>
+          <p:cNvPr id="25" name="TextBox 24"/>
+          <p:cNvSpPr txBox="1"/>
+          <p:nvPr/>
+        </p:nvSpPr>
+        <p:spPr>
+          <a:xfrm>
+            <a:off x="914400" y="5175504"/>
+            <a:ext cx="10424160" cy="201167"/>
+          </a:xfrm>
+          <a:prstGeom prst="rect">
+            <a:avLst/>
+          </a:prstGeom>
+          <a:noFill/>
+        </p:spPr>
+        <p:txBody>
+          <a:bodyPr wrap="square" anchor="t">
+            <a:spAutoFit/>
+          </a:bodyPr>
+          <a:lstStyle/>
+          <a:p>
+            <a:pPr algn="l"/>
+            <a:r>
+              <a:rPr sz="1200" b="0">
+                <a:solidFill>
+                  <a:srgbClr val="475569"/>
+                </a:solidFill>
+                <a:latin typeface="Calibri"/>
+              </a:rPr>
+              <a:t>Pluggable provider — DuckDuckGo (free) by default; Brave / Serper free-tier ready. SerpAPI rejected: it is paid (zero-spend).</a:t>
+            </a:r>
+          </a:p>
+        </p:txBody>
+      </p:sp>
+      <p:sp>
+        <p:nvSpPr>
+          <p:cNvPr id="26" name="Rounded Rectangle 25"/>
+          <p:cNvSpPr/>
+          <p:nvPr/>
+        </p:nvSpPr>
+        <p:spPr>
+          <a:xfrm>
+            <a:off x="640080" y="5559552"/>
+            <a:ext cx="10908792" cy="658368"/>
+          </a:xfrm>
+          <a:prstGeom prst="roundRect">
+            <a:avLst/>
+          </a:prstGeom>
+          <a:solidFill>
+            <a:srgbClr val="F1F5F9"/>
+          </a:solidFill>
+          <a:ln>
+            <a:noFill/>
+          </a:ln>
+          <a:effectLst/>
+        </p:spPr>
+        <p:style>
+          <a:lnRef idx="1">
+            <a:schemeClr val="accent1"/>
+          </a:lnRef>
+          <a:fillRef idx="3">
+            <a:schemeClr val="accent1"/>
+          </a:fillRef>
+          <a:effectRef idx="2">
+            <a:schemeClr val="accent1"/>
+          </a:effectRef>
+          <a:fontRef idx="minor">
+            <a:schemeClr val="lt1"/>
+          </a:fontRef>
+        </p:style>
+        <p:txBody>
+          <a:bodyPr rtlCol="0" anchor="ctr"/>
+          <a:lstStyle/>
+          <a:p>
+            <a:pPr algn="ctr"/>
+          </a:p>
+        </p:txBody>
+      </p:sp>
+      <p:sp>
+        <p:nvSpPr>
+          <p:cNvPr id="27" name="Rounded Rectangle 26"/>
+          <p:cNvSpPr/>
+          <p:nvPr/>
+        </p:nvSpPr>
+        <p:spPr>
+          <a:xfrm>
+            <a:off x="640080" y="5559552"/>
+            <a:ext cx="91440" cy="658368"/>
+          </a:xfrm>
+          <a:prstGeom prst="roundRect">
+            <a:avLst/>
+          </a:prstGeom>
+          <a:solidFill>
+            <a:srgbClr val="14B8A6"/>
+          </a:solidFill>
+          <a:ln>
+            <a:noFill/>
+          </a:ln>
+          <a:effectLst/>
+        </p:spPr>
+        <p:style>
+          <a:lnRef idx="1">
+            <a:schemeClr val="accent1"/>
+          </a:lnRef>
+          <a:fillRef idx="3">
+            <a:schemeClr val="accent1"/>
+          </a:fillRef>
+          <a:effectRef idx="2">
+            <a:schemeClr val="accent1"/>
+          </a:effectRef>
+          <a:fontRef idx="minor">
+            <a:schemeClr val="lt1"/>
+          </a:fontRef>
+        </p:style>
+        <p:txBody>
+          <a:bodyPr rtlCol="0" anchor="ctr"/>
+          <a:lstStyle/>
+          <a:p>
+            <a:pPr algn="ctr"/>
+          </a:p>
+        </p:txBody>
+      </p:sp>
+      <p:sp>
+        <p:nvSpPr>
+          <p:cNvPr id="28" name="TextBox 27"/>
+          <p:cNvSpPr txBox="1"/>
+          <p:nvPr/>
+        </p:nvSpPr>
+        <p:spPr>
+          <a:xfrm>
+            <a:off x="914400" y="5650992"/>
+            <a:ext cx="10241280" cy="365760"/>
+          </a:xfrm>
+          <a:prstGeom prst="rect">
+            <a:avLst/>
+          </a:prstGeom>
+          <a:noFill/>
+        </p:spPr>
+        <p:txBody>
+          <a:bodyPr wrap="square" anchor="t">
+            <a:spAutoFit/>
+          </a:bodyPr>
+          <a:lstStyle/>
+          <a:p>
+            <a:pPr algn="l"/>
+            <a:r>
+              <a:rPr sz="1500" b="1">
+                <a:solidFill>
+                  <a:srgbClr val="0F172A"/>
+                </a:solidFill>
+                <a:latin typeface="Calibri"/>
+              </a:rPr>
+              <a:t>Show the Chainlit work</a:t>
+            </a:r>
+          </a:p>
+        </p:txBody>
+      </p:sp>
+      <p:sp>
+        <p:nvSpPr>
+          <p:cNvPr id="29" name="TextBox 28"/>
+          <p:cNvSpPr txBox="1"/>
+          <p:nvPr/>
+        </p:nvSpPr>
+        <p:spPr>
+          <a:xfrm>
+            <a:off x="914400" y="5980176"/>
+            <a:ext cx="10424160" cy="201167"/>
+          </a:xfrm>
+          <a:prstGeom prst="rect">
+            <a:avLst/>
+          </a:prstGeom>
+          <a:noFill/>
+        </p:spPr>
+        <p:txBody>
+          <a:bodyPr wrap="square" anchor="t">
+            <a:spAutoFit/>
+          </a:bodyPr>
+          <a:lstStyle/>
+          <a:p>
+            <a:pPr algn="l"/>
+            <a:r>
+              <a:rPr sz="1200" b="0">
+                <a:solidFill>
+                  <a:srgbClr val="475569"/>
+                </a:solidFill>
+                <a:latin typeface="Calibri"/>
+              </a:rPr>
+              <a:t>The original Chainlit interface is embedded live inside the app under its own tab — same RAG engine, second UI.</a:t>
+            </a:r>
+          </a:p>
+        </p:txBody>
+      </p:sp>
+      <p:sp>
+        <p:nvSpPr>
+          <p:cNvPr id="30" name="TextBox 29"/>
+          <p:cNvSpPr txBox="1"/>
+          <p:nvPr/>
+        </p:nvSpPr>
+        <p:spPr>
+          <a:xfrm>
+            <a:off x="11430000" y="6400800"/>
+            <a:ext cx="457200" cy="274320"/>
+          </a:xfrm>
+          <a:prstGeom prst="rect">
+            <a:avLst/>
+          </a:prstGeom>
+          <a:noFill/>
+        </p:spPr>
+        <p:txBody>
+          <a:bodyPr wrap="square" anchor="t">
+            <a:spAutoFit/>
+          </a:bodyPr>
+          <a:lstStyle/>
+          <a:p>
+            <a:pPr algn="l"/>
+            <a:r>
+              <a:rPr sz="1100" b="0">
+                <a:solidFill>
+                  <a:srgbClr val="64748B"/>
+                </a:solidFill>
+                <a:latin typeface="Calibri"/>
+              </a:rPr>
+              <a:t>11</a:t>
+            </a:r>
+          </a:p>
+        </p:txBody>
+      </p:sp>
+    </p:spTree>
+  </p:cSld>
+  <p:clrMapOvr>
+    <a:masterClrMapping/>
+  </p:clrMapOvr>
+</p:sld>
+</file>
+
+<file path=ppt/slides/slide21.xml><?xml version="1.0" encoding="utf-8"?>
+<p:sld xmlns:a="http://schemas.openxmlformats.org/drawingml/2006/main" xmlns:p="http://schemas.openxmlformats.org/presentationml/2006/main" xmlns:r="http://schemas.openxmlformats.org/officeDocument/2006/relationships">
+  <p:cSld>
+    <p:spTree>
+      <p:nvGrpSpPr>
+        <p:cNvPr id="1" name=""/>
+        <p:cNvGrpSpPr/>
+        <p:nvPr/>
+      </p:nvGrpSpPr>
+      <p:grpSpPr/>
+      <p:sp>
+        <p:nvSpPr>
+          <p:cNvPr id="2" name="Rectangle 1"/>
+          <p:cNvSpPr/>
+          <p:nvPr/>
+        </p:nvSpPr>
+        <p:spPr>
+          <a:xfrm>
+            <a:off x="0" y="0"/>
+            <a:ext cx="12192000" cy="6858000"/>
+          </a:xfrm>
+          <a:prstGeom prst="rect">
+            <a:avLst/>
+          </a:prstGeom>
+          <a:solidFill>
+            <a:srgbClr val="FFFFFF"/>
+          </a:solidFill>
+          <a:ln>
+            <a:noFill/>
+          </a:ln>
+          <a:effectLst/>
+        </p:spPr>
+        <p:style>
+          <a:lnRef idx="1">
+            <a:schemeClr val="accent1"/>
+          </a:lnRef>
+          <a:fillRef idx="3">
+            <a:schemeClr val="accent1"/>
+          </a:fillRef>
+          <a:effectRef idx="2">
+            <a:schemeClr val="accent1"/>
+          </a:effectRef>
+          <a:fontRef idx="minor">
+            <a:schemeClr val="lt1"/>
+          </a:fontRef>
+        </p:style>
+        <p:txBody>
+          <a:bodyPr rtlCol="0" anchor="ctr"/>
+          <a:lstStyle/>
+          <a:p>
+            <a:pPr algn="ctr"/>
+          </a:p>
+        </p:txBody>
+      </p:sp>
+      <p:sp>
+        <p:nvSpPr>
+          <p:cNvPr id="3" name="Rounded Rectangle 2"/>
+          <p:cNvSpPr/>
+          <p:nvPr/>
+        </p:nvSpPr>
+        <p:spPr>
+          <a:xfrm>
+            <a:off x="548640" y="411480"/>
+            <a:ext cx="566928" cy="566928"/>
+          </a:xfrm>
+          <a:prstGeom prst="roundRect">
+            <a:avLst/>
+          </a:prstGeom>
+          <a:solidFill>
+            <a:srgbClr val="14B8A6"/>
+          </a:solidFill>
+          <a:ln>
+            <a:noFill/>
+          </a:ln>
+          <a:effectLst/>
+        </p:spPr>
+        <p:style>
+          <a:lnRef idx="1">
+            <a:schemeClr val="accent1"/>
+          </a:lnRef>
+          <a:fillRef idx="3">
+            <a:schemeClr val="accent1"/>
+          </a:fillRef>
+          <a:effectRef idx="2">
+            <a:schemeClr val="accent1"/>
+          </a:effectRef>
+          <a:fontRef idx="minor">
+            <a:schemeClr val="lt1"/>
+          </a:fontRef>
+        </p:style>
+        <p:txBody>
+          <a:bodyPr rtlCol="0" anchor="ctr"/>
+          <a:lstStyle/>
+          <a:p>
+            <a:pPr algn="ctr"/>
+          </a:p>
+        </p:txBody>
+      </p:sp>
+      <p:sp>
+        <p:nvSpPr>
+          <p:cNvPr id="4" name="TextBox 3"/>
+          <p:cNvSpPr txBox="1"/>
+          <p:nvPr/>
+        </p:nvSpPr>
+        <p:spPr>
+          <a:xfrm>
+            <a:off x="1280160" y="365760"/>
+            <a:ext cx="10332720" cy="640080"/>
+          </a:xfrm>
+          <a:prstGeom prst="rect">
+            <a:avLst/>
+          </a:prstGeom>
+          <a:noFill/>
+        </p:spPr>
+        <p:txBody>
+          <a:bodyPr wrap="square" anchor="t">
+            <a:spAutoFit/>
+          </a:bodyPr>
+          <a:lstStyle/>
+          <a:p>
+            <a:pPr algn="l"/>
+            <a:r>
+              <a:rPr sz="2800" b="1">
+                <a:solidFill>
+                  <a:srgbClr val="0F172A"/>
+                </a:solidFill>
+                <a:latin typeface="Calibri"/>
+              </a:rPr>
+              <a:t>Zero-Cost by Design</a:t>
+            </a:r>
+          </a:p>
+        </p:txBody>
+      </p:sp>
+      <p:sp>
+        <p:nvSpPr>
+          <p:cNvPr id="5" name="TextBox 4"/>
+          <p:cNvSpPr txBox="1"/>
+          <p:nvPr/>
+        </p:nvSpPr>
+        <p:spPr>
+          <a:xfrm>
+            <a:off x="1298448" y="969264"/>
+            <a:ext cx="10332720" cy="457200"/>
+          </a:xfrm>
+          <a:prstGeom prst="rect">
+            <a:avLst/>
+          </a:prstGeom>
+          <a:noFill/>
+        </p:spPr>
+        <p:txBody>
+          <a:bodyPr wrap="square" anchor="t">
+            <a:spAutoFit/>
+          </a:bodyPr>
+          <a:lstStyle/>
+          <a:p>
+            <a:pPr algn="l"/>
+            <a:r>
+              <a:rPr sz="1400" b="0">
+                <a:solidFill>
+                  <a:srgbClr val="475569"/>
+                </a:solidFill>
+                <a:latin typeface="Calibri"/>
+              </a:rPr>
+              <a:t>Production-grade RAG that costs $0 per query to run — the core engineering constraint.</a:t>
+            </a:r>
+          </a:p>
+        </p:txBody>
+      </p:sp>
+      <p:sp>
+        <p:nvSpPr>
+          <p:cNvPr id="6" name="Rounded Rectangle 5"/>
+          <p:cNvSpPr/>
+          <p:nvPr/>
+        </p:nvSpPr>
+        <p:spPr>
+          <a:xfrm>
+            <a:off x="640080" y="1691640"/>
+            <a:ext cx="10908792" cy="914400"/>
+          </a:xfrm>
+          <a:prstGeom prst="roundRect">
+            <a:avLst/>
+          </a:prstGeom>
+          <a:solidFill>
+            <a:srgbClr val="F1F5F9"/>
+          </a:solidFill>
+          <a:ln>
+            <a:noFill/>
+          </a:ln>
+          <a:effectLst/>
+        </p:spPr>
+        <p:style>
+          <a:lnRef idx="1">
+            <a:schemeClr val="accent1"/>
+          </a:lnRef>
+          <a:fillRef idx="3">
+            <a:schemeClr val="accent1"/>
+          </a:fillRef>
+          <a:effectRef idx="2">
+            <a:schemeClr val="accent1"/>
+          </a:effectRef>
+          <a:fontRef idx="minor">
+            <a:schemeClr val="lt1"/>
+          </a:fontRef>
+        </p:style>
+        <p:txBody>
+          <a:bodyPr rtlCol="0" anchor="ctr"/>
+          <a:lstStyle/>
+          <a:p>
+            <a:pPr algn="ctr"/>
+          </a:p>
+        </p:txBody>
+      </p:sp>
+      <p:sp>
+        <p:nvSpPr>
+          <p:cNvPr id="7" name="Rounded Rectangle 6"/>
+          <p:cNvSpPr/>
+          <p:nvPr/>
+        </p:nvSpPr>
+        <p:spPr>
+          <a:xfrm>
+            <a:off x="640080" y="1691640"/>
+            <a:ext cx="91440" cy="914400"/>
+          </a:xfrm>
+          <a:prstGeom prst="roundRect">
+            <a:avLst/>
+          </a:prstGeom>
+          <a:solidFill>
+            <a:srgbClr val="0D9488"/>
+          </a:solidFill>
+          <a:ln>
+            <a:noFill/>
+          </a:ln>
+          <a:effectLst/>
+        </p:spPr>
+        <p:style>
+          <a:lnRef idx="1">
+            <a:schemeClr val="accent1"/>
+          </a:lnRef>
+          <a:fillRef idx="3">
+            <a:schemeClr val="accent1"/>
+          </a:fillRef>
+          <a:effectRef idx="2">
+            <a:schemeClr val="accent1"/>
+          </a:effectRef>
+          <a:fontRef idx="minor">
+            <a:schemeClr val="lt1"/>
+          </a:fontRef>
+        </p:style>
+        <p:txBody>
+          <a:bodyPr rtlCol="0" anchor="ctr"/>
+          <a:lstStyle/>
+          <a:p>
+            <a:pPr algn="ctr"/>
+          </a:p>
+        </p:txBody>
+      </p:sp>
+      <p:sp>
+        <p:nvSpPr>
+          <p:cNvPr id="8" name="TextBox 7"/>
+          <p:cNvSpPr txBox="1"/>
+          <p:nvPr/>
+        </p:nvSpPr>
+        <p:spPr>
+          <a:xfrm>
+            <a:off x="914400" y="1783080"/>
+            <a:ext cx="10241280" cy="365760"/>
+          </a:xfrm>
+          <a:prstGeom prst="rect">
+            <a:avLst/>
+          </a:prstGeom>
+          <a:noFill/>
+        </p:spPr>
+        <p:txBody>
+          <a:bodyPr wrap="square" anchor="t">
+            <a:spAutoFit/>
+          </a:bodyPr>
+          <a:lstStyle/>
+          <a:p>
+            <a:pPr algn="l"/>
+            <a:r>
+              <a:rPr sz="1500" b="1">
+                <a:solidFill>
+                  <a:srgbClr val="0F172A"/>
+                </a:solidFill>
+                <a:latin typeface="Calibri"/>
+              </a:rPr>
+              <a:t>Local Claude CLI for all generation</a:t>
+            </a:r>
+          </a:p>
+        </p:txBody>
+      </p:sp>
+      <p:sp>
+        <p:nvSpPr>
+          <p:cNvPr id="9" name="TextBox 8"/>
+          <p:cNvSpPr txBox="1"/>
+          <p:nvPr/>
+        </p:nvSpPr>
+        <p:spPr>
+          <a:xfrm>
+            <a:off x="914400" y="2112264"/>
+            <a:ext cx="10424160" cy="457200"/>
+          </a:xfrm>
+          <a:prstGeom prst="rect">
+            <a:avLst/>
+          </a:prstGeom>
+          <a:noFill/>
+        </p:spPr>
+        <p:txBody>
+          <a:bodyPr wrap="square" anchor="t">
+            <a:spAutoFit/>
+          </a:bodyPr>
+          <a:lstStyle/>
+          <a:p>
+            <a:pPr algn="l"/>
+            <a:r>
+              <a:rPr sz="1200" b="0">
+                <a:solidFill>
+                  <a:srgbClr val="475569"/>
+                </a:solidFill>
+                <a:latin typeface="Calibri"/>
+              </a:rPr>
+              <a:t>Answer generation, the CRAG relevance grader, the query gate and the rewriter all run through the host's local `claude` CLI (Claude Max). No per-query API cost, no API key in the app, and the papers never leave the box.</a:t>
+            </a:r>
+          </a:p>
+        </p:txBody>
+      </p:sp>
+      <p:sp>
+        <p:nvSpPr>
+          <p:cNvPr id="10" name="Rounded Rectangle 9"/>
+          <p:cNvSpPr/>
+          <p:nvPr/>
+        </p:nvSpPr>
+        <p:spPr>
+          <a:xfrm>
+            <a:off x="640080" y="2752344"/>
+            <a:ext cx="10908792" cy="914400"/>
+          </a:xfrm>
+          <a:prstGeom prst="roundRect">
+            <a:avLst/>
+          </a:prstGeom>
+          <a:solidFill>
+            <a:srgbClr val="F1F5F9"/>
+          </a:solidFill>
+          <a:ln>
+            <a:noFill/>
+          </a:ln>
+          <a:effectLst/>
+        </p:spPr>
+        <p:style>
+          <a:lnRef idx="1">
+            <a:schemeClr val="accent1"/>
+          </a:lnRef>
+          <a:fillRef idx="3">
+            <a:schemeClr val="accent1"/>
+          </a:fillRef>
+          <a:effectRef idx="2">
+            <a:schemeClr val="accent1"/>
+          </a:effectRef>
+          <a:fontRef idx="minor">
+            <a:schemeClr val="lt1"/>
+          </a:fontRef>
+        </p:style>
+        <p:txBody>
+          <a:bodyPr rtlCol="0" anchor="ctr"/>
+          <a:lstStyle/>
+          <a:p>
+            <a:pPr algn="ctr"/>
+          </a:p>
+        </p:txBody>
+      </p:sp>
+      <p:sp>
+        <p:nvSpPr>
+          <p:cNvPr id="11" name="Rounded Rectangle 10"/>
+          <p:cNvSpPr/>
+          <p:nvPr/>
+        </p:nvSpPr>
+        <p:spPr>
+          <a:xfrm>
+            <a:off x="640080" y="2752344"/>
+            <a:ext cx="91440" cy="914400"/>
+          </a:xfrm>
+          <a:prstGeom prst="roundRect">
+            <a:avLst/>
+          </a:prstGeom>
+          <a:solidFill>
+            <a:srgbClr val="14B8A6"/>
+          </a:solidFill>
+          <a:ln>
+            <a:noFill/>
+          </a:ln>
+          <a:effectLst/>
+        </p:spPr>
+        <p:style>
+          <a:lnRef idx="1">
+            <a:schemeClr val="accent1"/>
+          </a:lnRef>
+          <a:fillRef idx="3">
+            <a:schemeClr val="accent1"/>
+          </a:fillRef>
+          <a:effectRef idx="2">
+            <a:schemeClr val="accent1"/>
+          </a:effectRef>
+          <a:fontRef idx="minor">
+            <a:schemeClr val="lt1"/>
+          </a:fontRef>
+        </p:style>
+        <p:txBody>
+          <a:bodyPr rtlCol="0" anchor="ctr"/>
+          <a:lstStyle/>
+          <a:p>
+            <a:pPr algn="ctr"/>
+          </a:p>
+        </p:txBody>
+      </p:sp>
+      <p:sp>
+        <p:nvSpPr>
+          <p:cNvPr id="12" name="TextBox 11"/>
+          <p:cNvSpPr txBox="1"/>
+          <p:nvPr/>
+        </p:nvSpPr>
+        <p:spPr>
+          <a:xfrm>
+            <a:off x="914400" y="2843784"/>
+            <a:ext cx="10241280" cy="365760"/>
+          </a:xfrm>
+          <a:prstGeom prst="rect">
+            <a:avLst/>
+          </a:prstGeom>
+          <a:noFill/>
+        </p:spPr>
+        <p:txBody>
+          <a:bodyPr wrap="square" anchor="t">
+            <a:spAutoFit/>
+          </a:bodyPr>
+          <a:lstStyle/>
+          <a:p>
+            <a:pPr algn="l"/>
+            <a:r>
+              <a:rPr sz="1500" b="1">
+                <a:solidFill>
+                  <a:srgbClr val="0F172A"/>
+                </a:solidFill>
+                <a:latin typeface="Calibri"/>
+              </a:rPr>
+              <a:t>Local, CPU-only retrieval</a:t>
+            </a:r>
+          </a:p>
+        </p:txBody>
+      </p:sp>
+      <p:sp>
+        <p:nvSpPr>
+          <p:cNvPr id="13" name="TextBox 12"/>
+          <p:cNvSpPr txBox="1"/>
+          <p:nvPr/>
+        </p:nvSpPr>
+        <p:spPr>
+          <a:xfrm>
+            <a:off x="914400" y="3172968"/>
+            <a:ext cx="10424160" cy="457200"/>
+          </a:xfrm>
+          <a:prstGeom prst="rect">
+            <a:avLst/>
+          </a:prstGeom>
+          <a:noFill/>
+        </p:spPr>
+        <p:txBody>
+          <a:bodyPr wrap="square" anchor="t">
+            <a:spAutoFit/>
+          </a:bodyPr>
+          <a:lstStyle/>
+          <a:p>
+            <a:pPr algn="l"/>
+            <a:r>
+              <a:rPr sz="1200" b="0">
+                <a:solidFill>
+                  <a:srgbClr val="475569"/>
+                </a:solidFill>
+                <a:latin typeface="Calibri"/>
+              </a:rPr>
+              <a:t>Open-source embeddings (MiniLM, BGE) and the BM25 keyword index run on the VPS CPU; Chroma is an embedded vector DB persisted to disk — no database server to operate.</a:t>
+            </a:r>
+          </a:p>
+        </p:txBody>
+      </p:sp>
+      <p:sp>
+        <p:nvSpPr>
+          <p:cNvPr id="14" name="Rounded Rectangle 13"/>
+          <p:cNvSpPr/>
+          <p:nvPr/>
+        </p:nvSpPr>
+        <p:spPr>
+          <a:xfrm>
+            <a:off x="640080" y="3813048"/>
+            <a:ext cx="10908792" cy="914400"/>
+          </a:xfrm>
+          <a:prstGeom prst="roundRect">
+            <a:avLst/>
+          </a:prstGeom>
+          <a:solidFill>
+            <a:srgbClr val="F1F5F9"/>
+          </a:solidFill>
+          <a:ln>
+            <a:noFill/>
+          </a:ln>
+          <a:effectLst/>
+        </p:spPr>
+        <p:style>
+          <a:lnRef idx="1">
+            <a:schemeClr val="accent1"/>
+          </a:lnRef>
+          <a:fillRef idx="3">
+            <a:schemeClr val="accent1"/>
+          </a:fillRef>
+          <a:effectRef idx="2">
+            <a:schemeClr val="accent1"/>
+          </a:effectRef>
+          <a:fontRef idx="minor">
+            <a:schemeClr val="lt1"/>
+          </a:fontRef>
+        </p:style>
+        <p:txBody>
+          <a:bodyPr rtlCol="0" anchor="ctr"/>
+          <a:lstStyle/>
+          <a:p>
+            <a:pPr algn="ctr"/>
+          </a:p>
+        </p:txBody>
+      </p:sp>
+      <p:sp>
+        <p:nvSpPr>
+          <p:cNvPr id="15" name="Rounded Rectangle 14"/>
+          <p:cNvSpPr/>
+          <p:nvPr/>
+        </p:nvSpPr>
+        <p:spPr>
+          <a:xfrm>
+            <a:off x="640080" y="3813048"/>
+            <a:ext cx="91440" cy="914400"/>
+          </a:xfrm>
+          <a:prstGeom prst="roundRect">
+            <a:avLst/>
+          </a:prstGeom>
+          <a:solidFill>
+            <a:srgbClr val="2DD4BF"/>
+          </a:solidFill>
+          <a:ln>
+            <a:noFill/>
+          </a:ln>
+          <a:effectLst/>
+        </p:spPr>
+        <p:style>
+          <a:lnRef idx="1">
+            <a:schemeClr val="accent1"/>
+          </a:lnRef>
+          <a:fillRef idx="3">
+            <a:schemeClr val="accent1"/>
+          </a:fillRef>
+          <a:effectRef idx="2">
+            <a:schemeClr val="accent1"/>
+          </a:effectRef>
+          <a:fontRef idx="minor">
+            <a:schemeClr val="lt1"/>
+          </a:fontRef>
+        </p:style>
+        <p:txBody>
+          <a:bodyPr rtlCol="0" anchor="ctr"/>
+          <a:lstStyle/>
+          <a:p>
+            <a:pPr algn="ctr"/>
+          </a:p>
+        </p:txBody>
+      </p:sp>
+      <p:sp>
+        <p:nvSpPr>
+          <p:cNvPr id="16" name="TextBox 15"/>
+          <p:cNvSpPr txBox="1"/>
+          <p:nvPr/>
+        </p:nvSpPr>
+        <p:spPr>
+          <a:xfrm>
+            <a:off x="914400" y="3904487"/>
+            <a:ext cx="10241280" cy="365760"/>
+          </a:xfrm>
+          <a:prstGeom prst="rect">
+            <a:avLst/>
+          </a:prstGeom>
+          <a:noFill/>
+        </p:spPr>
+        <p:txBody>
+          <a:bodyPr wrap="square" anchor="t">
+            <a:spAutoFit/>
+          </a:bodyPr>
+          <a:lstStyle/>
+          <a:p>
+            <a:pPr algn="l"/>
+            <a:r>
+              <a:rPr sz="1500" b="1">
+                <a:solidFill>
+                  <a:srgbClr val="0F172A"/>
+                </a:solidFill>
+                <a:latin typeface="Calibri"/>
+              </a:rPr>
+              <a:t>Only free tiers touch the network</a:t>
+            </a:r>
+          </a:p>
+        </p:txBody>
+      </p:sp>
+      <p:sp>
+        <p:nvSpPr>
+          <p:cNvPr id="17" name="TextBox 16"/>
+          <p:cNvSpPr txBox="1"/>
+          <p:nvPr/>
+        </p:nvSpPr>
+        <p:spPr>
+          <a:xfrm>
+            <a:off x="914400" y="4233672"/>
+            <a:ext cx="10424160" cy="457200"/>
+          </a:xfrm>
+          <a:prstGeom prst="rect">
+            <a:avLst/>
+          </a:prstGeom>
+          <a:noFill/>
+        </p:spPr>
+        <p:txBody>
+          <a:bodyPr wrap="square" anchor="t">
+            <a:spAutoFit/>
+          </a:bodyPr>
+          <a:lstStyle/>
+          <a:p>
+            <a:pPr algn="l"/>
+            <a:r>
+              <a:rPr sz="1200" b="0">
+                <a:solidFill>
+                  <a:srgbClr val="475569"/>
+                </a:solidFill>
+                <a:latin typeface="Calibri"/>
+              </a:rPr>
+              <a:t>Gemini embedding (free tier) is included purely for the open-source-vs-commercial comparison; the web-search fallback uses DuckDuckGo (free, no key). Nothing paid.</a:t>
+            </a:r>
+          </a:p>
+        </p:txBody>
+      </p:sp>
+      <p:sp>
+        <p:nvSpPr>
+          <p:cNvPr id="18" name="TextBox 17"/>
+          <p:cNvSpPr txBox="1"/>
+          <p:nvPr/>
+        </p:nvSpPr>
+        <p:spPr>
+          <a:xfrm>
+            <a:off x="11430000" y="6400800"/>
+            <a:ext cx="457200" cy="274320"/>
+          </a:xfrm>
+          <a:prstGeom prst="rect">
+            <a:avLst/>
+          </a:prstGeom>
+          <a:noFill/>
+        </p:spPr>
+        <p:txBody>
+          <a:bodyPr wrap="square" anchor="t">
+            <a:spAutoFit/>
+          </a:bodyPr>
+          <a:lstStyle/>
+          <a:p>
+            <a:pPr algn="l"/>
+            <a:r>
+              <a:rPr sz="1100" b="0">
+                <a:solidFill>
+                  <a:srgbClr val="64748B"/>
+                </a:solidFill>
+                <a:latin typeface="Calibri"/>
+              </a:rPr>
+              <a:t>12</a:t>
+            </a:r>
           </a:p>
         </p:txBody>
       </p:sp>
@@ -9082,6 +13056,10 @@
           </a:solidFill>
           <a:ln/>
         </p:spPr>
+        <p:txBody>
+          <a:bodyPr/>
+          <a:p/>
+        </p:txBody>
       </p:sp>
       <p:pic>
         <p:nvPicPr>
@@ -9218,6 +13196,10 @@
             </a:outerShdw>
           </a:effectLst>
         </p:spPr>
+        <p:txBody>
+          <a:bodyPr/>
+          <a:p/>
+        </p:txBody>
       </p:sp>
       <p:sp>
         <p:nvSpPr>
@@ -9347,6 +13329,10 @@
             </a:outerShdw>
           </a:effectLst>
         </p:spPr>
+        <p:txBody>
+          <a:bodyPr/>
+          <a:p/>
+        </p:txBody>
       </p:sp>
       <p:sp>
         <p:nvSpPr>
@@ -9476,6 +13462,10 @@
             </a:outerShdw>
           </a:effectLst>
         </p:spPr>
+        <p:txBody>
+          <a:bodyPr/>
+          <a:p/>
+        </p:txBody>
       </p:sp>
       <p:sp>
         <p:nvSpPr>
@@ -9605,6 +13595,10 @@
             </a:outerShdw>
           </a:effectLst>
         </p:spPr>
+        <p:txBody>
+          <a:bodyPr/>
+          <a:p/>
+        </p:txBody>
       </p:sp>
       <p:sp>
         <p:nvSpPr>
@@ -9734,6 +13728,10 @@
             </a:outerShdw>
           </a:effectLst>
         </p:spPr>
+        <p:txBody>
+          <a:bodyPr/>
+          <a:p/>
+        </p:txBody>
       </p:sp>
       <p:sp>
         <p:nvSpPr>
@@ -9931,6 +13929,10 @@
           </a:solidFill>
           <a:ln/>
         </p:spPr>
+        <p:txBody>
+          <a:bodyPr/>
+          <a:p/>
+        </p:txBody>
       </p:sp>
       <p:pic>
         <p:nvPicPr>
@@ -10028,7 +14030,7 @@
                 <a:ea typeface="Calibri" pitchFamily="34" charset="-122"/>
                 <a:cs typeface="Calibri" pitchFamily="34" charset="-120"/>
               </a:rPr>
-              <a:t>Layered components on one VPS, calling external APIs for embeddings, generation and web search.</a:t>
+              <a:t>Layered components on one VPS, embeddings on a free tier and an optional web search — generation runs locally.</a:t>
             </a:r>
             <a:endParaRPr lang="en-US" sz="1400" dirty="0"/>
           </a:p>
@@ -10058,6 +14060,10 @@
             <a:prstDash val="solid"/>
           </a:ln>
         </p:spPr>
+        <p:txBody>
+          <a:bodyPr/>
+          <a:p/>
+        </p:txBody>
       </p:sp>
       <p:sp>
         <p:nvSpPr>
@@ -10078,6 +14084,10 @@
           </a:solidFill>
           <a:ln/>
         </p:spPr>
+        <p:txBody>
+          <a:bodyPr/>
+          <a:p/>
+        </p:txBody>
       </p:sp>
       <p:sp>
         <p:nvSpPr>
@@ -10151,6 +14161,10 @@
             </a:outerShdw>
           </a:effectLst>
         </p:spPr>
+        <p:txBody>
+          <a:bodyPr/>
+          <a:p/>
+        </p:txBody>
       </p:sp>
       <p:sp>
         <p:nvSpPr>
@@ -10224,6 +14238,10 @@
             </a:outerShdw>
           </a:effectLst>
         </p:spPr>
+        <p:txBody>
+          <a:bodyPr/>
+          <a:p/>
+        </p:txBody>
       </p:sp>
       <p:sp>
         <p:nvSpPr>
@@ -10288,6 +14306,10 @@
             <a:prstDash val="solid"/>
           </a:ln>
         </p:spPr>
+        <p:txBody>
+          <a:bodyPr/>
+          <a:p/>
+        </p:txBody>
       </p:sp>
       <p:sp>
         <p:nvSpPr>
@@ -10308,6 +14330,10 @@
           </a:solidFill>
           <a:ln/>
         </p:spPr>
+        <p:txBody>
+          <a:bodyPr/>
+          <a:p/>
+        </p:txBody>
       </p:sp>
       <p:sp>
         <p:nvSpPr>
@@ -10398,6 +14424,10 @@
             </a:outerShdw>
           </a:effectLst>
         </p:spPr>
+        <p:txBody>
+          <a:bodyPr/>
+          <a:p/>
+        </p:txBody>
       </p:sp>
       <p:sp>
         <p:nvSpPr>
@@ -10488,6 +14518,10 @@
             </a:outerShdw>
           </a:effectLst>
         </p:spPr>
+        <p:txBody>
+          <a:bodyPr/>
+          <a:p/>
+        </p:txBody>
       </p:sp>
       <p:sp>
         <p:nvSpPr>
@@ -10578,6 +14612,10 @@
             </a:outerShdw>
           </a:effectLst>
         </p:spPr>
+        <p:txBody>
+          <a:bodyPr/>
+          <a:p/>
+        </p:txBody>
       </p:sp>
       <p:sp>
         <p:nvSpPr>
@@ -10659,6 +14697,10 @@
             <a:prstDash val="solid"/>
           </a:ln>
         </p:spPr>
+        <p:txBody>
+          <a:bodyPr/>
+          <a:p/>
+        </p:txBody>
       </p:sp>
       <p:sp>
         <p:nvSpPr>
@@ -10679,6 +14721,10 @@
           </a:solidFill>
           <a:ln/>
         </p:spPr>
+        <p:txBody>
+          <a:bodyPr/>
+          <a:p/>
+        </p:txBody>
       </p:sp>
       <p:sp>
         <p:nvSpPr>
@@ -10752,6 +14798,10 @@
             </a:outerShdw>
           </a:effectLst>
         </p:spPr>
+        <p:txBody>
+          <a:bodyPr/>
+          <a:p/>
+        </p:txBody>
       </p:sp>
       <p:sp>
         <p:nvSpPr>
@@ -10825,6 +14875,10 @@
             </a:outerShdw>
           </a:effectLst>
         </p:spPr>
+        <p:txBody>
+          <a:bodyPr/>
+          <a:p/>
+        </p:txBody>
       </p:sp>
       <p:sp>
         <p:nvSpPr>
@@ -10889,6 +14943,10 @@
             <a:prstDash val="solid"/>
           </a:ln>
         </p:spPr>
+        <p:txBody>
+          <a:bodyPr/>
+          <a:p/>
+        </p:txBody>
       </p:sp>
       <p:sp>
         <p:nvSpPr>
@@ -10909,6 +14967,10 @@
           </a:solidFill>
           <a:ln/>
         </p:spPr>
+        <p:txBody>
+          <a:bodyPr/>
+          <a:p/>
+        </p:txBody>
       </p:sp>
       <p:sp>
         <p:nvSpPr>
@@ -10999,6 +15061,10 @@
             </a:outerShdw>
           </a:effectLst>
         </p:spPr>
+        <p:txBody>
+          <a:bodyPr/>
+          <a:p/>
+        </p:txBody>
       </p:sp>
       <p:sp>
         <p:nvSpPr>
@@ -11089,6 +15155,10 @@
             </a:outerShdw>
           </a:effectLst>
         </p:spPr>
+        <p:txBody>
+          <a:bodyPr/>
+          <a:p/>
+        </p:txBody>
       </p:sp>
       <p:sp>
         <p:nvSpPr>
@@ -11179,6 +15249,10 @@
             </a:outerShdw>
           </a:effectLst>
         </p:spPr>
+        <p:txBody>
+          <a:bodyPr/>
+          <a:p/>
+        </p:txBody>
       </p:sp>
       <p:sp>
         <p:nvSpPr>
@@ -11259,6 +15333,10 @@
             <a:tailEnd type="triangle"/>
           </a:ln>
         </p:spPr>
+        <p:txBody>
+          <a:bodyPr/>
+          <a:p/>
+        </p:txBody>
       </p:sp>
       <p:sp>
         <p:nvSpPr>
@@ -11283,6 +15361,10 @@
             <a:tailEnd type="triangle"/>
           </a:ln>
         </p:spPr>
+        <p:txBody>
+          <a:bodyPr/>
+          <a:p/>
+        </p:txBody>
       </p:sp>
       <p:sp>
         <p:nvSpPr>
@@ -11307,6 +15389,10 @@
             <a:tailEnd type="triangle"/>
           </a:ln>
         </p:spPr>
+        <p:txBody>
+          <a:bodyPr/>
+          <a:p/>
+        </p:txBody>
       </p:sp>
       <p:sp>
         <p:nvSpPr>
@@ -11332,6 +15418,10 @@
             <a:prstDash val="solid"/>
           </a:ln>
         </p:spPr>
+        <p:txBody>
+          <a:bodyPr/>
+          <a:p/>
+        </p:txBody>
       </p:sp>
       <p:sp>
         <p:nvSpPr>
@@ -11352,6 +15442,10 @@
           </a:solidFill>
           <a:ln/>
         </p:spPr>
+        <p:txBody>
+          <a:bodyPr/>
+          <a:p/>
+        </p:txBody>
       </p:sp>
       <p:sp>
         <p:nvSpPr>
@@ -11425,6 +15519,10 @@
             </a:outerShdw>
           </a:effectLst>
         </p:spPr>
+        <p:txBody>
+          <a:bodyPr/>
+          <a:p/>
+        </p:txBody>
       </p:sp>
       <p:sp>
         <p:nvSpPr>
@@ -11498,6 +15596,10 @@
             </a:outerShdw>
           </a:effectLst>
         </p:spPr>
+        <p:txBody>
+          <a:bodyPr/>
+          <a:p/>
+        </p:txBody>
       </p:sp>
       <p:sp>
         <p:nvSpPr>
@@ -11532,7 +15634,7 @@
                 <a:ea typeface="Calibri" pitchFamily="34" charset="-122"/>
                 <a:cs typeface="Calibri" pitchFamily="34" charset="-120"/>
               </a:rPr>
-              <a:t>OpenAI — GPT (generation)</a:t>
+              <a:t>Claude — local CLI ($0, no API key)</a:t>
             </a:r>
             <a:endParaRPr lang="en-US" sz="1250" dirty="0"/>
           </a:p>
@@ -11571,6 +15673,10 @@
             </a:outerShdw>
           </a:effectLst>
         </p:spPr>
+        <p:txBody>
+          <a:bodyPr/>
+          <a:p/>
+        </p:txBody>
       </p:sp>
       <p:sp>
         <p:nvSpPr>
@@ -11634,6 +15740,10 @@
             <a:tailEnd type="triangle"/>
           </a:ln>
         </p:spPr>
+        <p:txBody>
+          <a:bodyPr/>
+          <a:p/>
+        </p:txBody>
       </p:sp>
       <p:sp>
         <p:nvSpPr>
@@ -11658,6 +15768,10 @@
             <a:tailEnd type="triangle"/>
           </a:ln>
         </p:spPr>
+        <p:txBody>
+          <a:bodyPr/>
+          <a:p/>
+        </p:txBody>
       </p:sp>
       <p:sp>
         <p:nvSpPr>
@@ -11678,6 +15792,10 @@
           </a:solidFill>
           <a:ln/>
         </p:spPr>
+        <p:txBody>
+          <a:bodyPr/>
+          <a:p/>
+        </p:txBody>
       </p:sp>
       <p:sp>
         <p:nvSpPr>
@@ -11756,6 +15874,10 @@
             <a:prstDash val="solid"/>
           </a:ln>
         </p:spPr>
+        <p:txBody>
+          <a:bodyPr/>
+          <a:p/>
+        </p:txBody>
       </p:sp>
       <p:sp>
         <p:nvSpPr>
@@ -11776,6 +15898,10 @@
           </a:solidFill>
           <a:ln/>
         </p:spPr>
+        <p:txBody>
+          <a:bodyPr/>
+          <a:p/>
+        </p:txBody>
       </p:sp>
       <p:sp>
         <p:nvSpPr>
@@ -11866,6 +15992,10 @@
             </a:outerShdw>
           </a:effectLst>
         </p:spPr>
+        <p:txBody>
+          <a:bodyPr/>
+          <a:p/>
+        </p:txBody>
       </p:sp>
       <p:sp>
         <p:nvSpPr>
@@ -11929,6 +16059,10 @@
             <a:tailEnd type="triangle"/>
           </a:ln>
         </p:spPr>
+        <p:txBody>
+          <a:bodyPr/>
+          <a:p/>
+        </p:txBody>
       </p:sp>
       <p:sp>
         <p:nvSpPr>
@@ -11963,6 +16097,10 @@
             </a:outerShdw>
           </a:effectLst>
         </p:spPr>
+        <p:txBody>
+          <a:bodyPr/>
+          <a:p/>
+        </p:txBody>
       </p:sp>
       <p:sp>
         <p:nvSpPr>
@@ -12026,6 +16164,10 @@
             <a:tailEnd type="triangle"/>
           </a:ln>
         </p:spPr>
+        <p:txBody>
+          <a:bodyPr/>
+          <a:p/>
+        </p:txBody>
       </p:sp>
       <p:sp>
         <p:nvSpPr>
@@ -12060,6 +16202,10 @@
             </a:outerShdw>
           </a:effectLst>
         </p:spPr>
+        <p:txBody>
+          <a:bodyPr/>
+          <a:p/>
+        </p:txBody>
       </p:sp>
       <p:sp>
         <p:nvSpPr>
@@ -12123,6 +16269,10 @@
             <a:tailEnd type="triangle"/>
           </a:ln>
         </p:spPr>
+        <p:txBody>
+          <a:bodyPr/>
+          <a:p/>
+        </p:txBody>
       </p:sp>
       <p:sp>
         <p:nvSpPr>
@@ -12157,6 +16307,10 @@
             </a:outerShdw>
           </a:effectLst>
         </p:spPr>
+        <p:txBody>
+          <a:bodyPr/>
+          <a:p/>
+        </p:txBody>
       </p:sp>
       <p:sp>
         <p:nvSpPr>
@@ -12220,6 +16374,10 @@
             <a:tailEnd type="triangle"/>
           </a:ln>
         </p:spPr>
+        <p:txBody>
+          <a:bodyPr/>
+          <a:p/>
+        </p:txBody>
       </p:sp>
       <p:sp>
         <p:nvSpPr>
@@ -12254,6 +16412,10 @@
             </a:outerShdw>
           </a:effectLst>
         </p:spPr>
+        <p:txBody>
+          <a:bodyPr/>
+          <a:p/>
+        </p:txBody>
       </p:sp>
       <p:sp>
         <p:nvSpPr>
@@ -12384,6 +16546,10 @@
           </a:solidFill>
           <a:ln/>
         </p:spPr>
+        <p:txBody>
+          <a:bodyPr/>
+          <a:p/>
+        </p:txBody>
       </p:sp>
       <p:pic>
         <p:nvPicPr>
@@ -12520,6 +16686,10 @@
             </a:outerShdw>
           </a:effectLst>
         </p:spPr>
+        <p:txBody>
+          <a:bodyPr/>
+          <a:p/>
+        </p:txBody>
       </p:sp>
       <p:sp>
         <p:nvSpPr>
@@ -12622,6 +16792,10 @@
             <a:tailEnd type="triangle"/>
           </a:ln>
         </p:spPr>
+        <p:txBody>
+          <a:bodyPr/>
+          <a:p/>
+        </p:txBody>
       </p:sp>
       <p:sp>
         <p:nvSpPr>
@@ -12656,6 +16830,10 @@
             </a:outerShdw>
           </a:effectLst>
         </p:spPr>
+        <p:txBody>
+          <a:bodyPr/>
+          <a:p/>
+        </p:txBody>
       </p:sp>
       <p:sp>
         <p:nvSpPr>
@@ -12775,6 +16953,10 @@
             <a:tailEnd type="triangle"/>
           </a:ln>
         </p:spPr>
+        <p:txBody>
+          <a:bodyPr/>
+          <a:p/>
+        </p:txBody>
       </p:sp>
       <p:sp>
         <p:nvSpPr>
@@ -12809,6 +16991,10 @@
             </a:outerShdw>
           </a:effectLst>
         </p:spPr>
+        <p:txBody>
+          <a:bodyPr/>
+          <a:p/>
+        </p:txBody>
       </p:sp>
       <p:sp>
         <p:nvSpPr>
@@ -12945,6 +17131,10 @@
             <a:tailEnd type="triangle"/>
           </a:ln>
         </p:spPr>
+        <p:txBody>
+          <a:bodyPr/>
+          <a:p/>
+        </p:txBody>
       </p:sp>
       <p:sp>
         <p:nvSpPr>
@@ -12979,6 +17169,10 @@
             </a:outerShdw>
           </a:effectLst>
         </p:spPr>
+        <p:txBody>
+          <a:bodyPr/>
+          <a:p/>
+        </p:txBody>
       </p:sp>
       <p:sp>
         <p:nvSpPr>
@@ -13052,7 +17246,7 @@
                 <a:ea typeface="Calibri" pitchFamily="34" charset="-122"/>
                 <a:cs typeface="Calibri" pitchFamily="34" charset="-120"/>
               </a:rPr>
-              <a:t>GPT answers</a:t>
+              <a:t>Claude answers</a:t>
             </a:r>
             <a:endParaRPr lang="en-US" sz="1100" dirty="0"/>
           </a:p>
@@ -13098,6 +17292,10 @@
             <a:tailEnd type="triangle"/>
           </a:ln>
         </p:spPr>
+        <p:txBody>
+          <a:bodyPr/>
+          <a:p/>
+        </p:txBody>
       </p:sp>
       <p:sp>
         <p:nvSpPr>
@@ -13132,6 +17330,10 @@
             </a:outerShdw>
           </a:effectLst>
         </p:spPr>
+        <p:txBody>
+          <a:bodyPr/>
+          <a:p/>
+        </p:txBody>
       </p:sp>
       <p:sp>
         <p:nvSpPr>
@@ -13278,6 +17480,10 @@
             </a:outerShdw>
           </a:effectLst>
         </p:spPr>
+        <p:txBody>
+          <a:bodyPr/>
+          <a:p/>
+        </p:txBody>
       </p:sp>
       <p:sp>
         <p:nvSpPr>
@@ -13298,6 +17504,10 @@
           </a:solidFill>
           <a:ln/>
         </p:spPr>
+        <p:txBody>
+          <a:bodyPr/>
+          <a:p/>
+        </p:txBody>
       </p:sp>
       <p:pic>
         <p:nvPicPr>
@@ -13395,6 +17605,10 @@
             </a:outerShdw>
           </a:effectLst>
         </p:spPr>
+        <p:txBody>
+          <a:bodyPr/>
+          <a:p/>
+        </p:txBody>
       </p:sp>
       <p:sp>
         <p:nvSpPr>
@@ -13458,6 +17672,10 @@
             <a:tailEnd type="triangle"/>
           </a:ln>
         </p:spPr>
+        <p:txBody>
+          <a:bodyPr/>
+          <a:p/>
+        </p:txBody>
       </p:sp>
       <p:sp>
         <p:nvSpPr>
@@ -13492,6 +17710,10 @@
             </a:outerShdw>
           </a:effectLst>
         </p:spPr>
+        <p:txBody>
+          <a:bodyPr/>
+          <a:p/>
+        </p:txBody>
       </p:sp>
       <p:sp>
         <p:nvSpPr>
@@ -13555,6 +17777,10 @@
             <a:tailEnd type="triangle"/>
           </a:ln>
         </p:spPr>
+        <p:txBody>
+          <a:bodyPr/>
+          <a:p/>
+        </p:txBody>
       </p:sp>
       <p:sp>
         <p:nvSpPr>
@@ -13589,6 +17815,10 @@
             </a:outerShdw>
           </a:effectLst>
         </p:spPr>
+        <p:txBody>
+          <a:bodyPr/>
+          <a:p/>
+        </p:txBody>
       </p:sp>
       <p:sp>
         <p:nvSpPr>
@@ -13652,6 +17882,10 @@
             <a:tailEnd type="triangle"/>
           </a:ln>
         </p:spPr>
+        <p:txBody>
+          <a:bodyPr/>
+          <a:p/>
+        </p:txBody>
       </p:sp>
       <p:sp>
         <p:nvSpPr>
@@ -13686,6 +17920,10 @@
             </a:outerShdw>
           </a:effectLst>
         </p:spPr>
+        <p:txBody>
+          <a:bodyPr/>
+          <a:p/>
+        </p:txBody>
       </p:sp>
       <p:sp>
         <p:nvSpPr>
@@ -13855,6 +18093,10 @@
           </a:solidFill>
           <a:ln/>
         </p:spPr>
+        <p:txBody>
+          <a:bodyPr/>
+          <a:p/>
+        </p:txBody>
       </p:sp>
       <p:pic>
         <p:nvPicPr>
@@ -14450,6 +18692,10 @@
           </a:solidFill>
           <a:ln/>
         </p:spPr>
+        <p:txBody>
+          <a:bodyPr/>
+          <a:p/>
+        </p:txBody>
       </p:sp>
       <p:pic>
         <p:nvPicPr>
@@ -14586,6 +18832,10 @@
             </a:outerShdw>
           </a:effectLst>
         </p:spPr>
+        <p:txBody>
+          <a:bodyPr/>
+          <a:p/>
+        </p:txBody>
       </p:sp>
       <p:sp>
         <p:nvSpPr>
@@ -14737,6 +18987,10 @@
             </a:outerShdw>
           </a:effectLst>
         </p:spPr>
+        <p:txBody>
+          <a:bodyPr/>
+          <a:p/>
+        </p:txBody>
       </p:sp>
       <p:sp>
         <p:nvSpPr>
@@ -14888,6 +19142,10 @@
             </a:outerShdw>
           </a:effectLst>
         </p:spPr>
+        <p:txBody>
+          <a:bodyPr/>
+          <a:p/>
+        </p:txBody>
       </p:sp>
       <p:sp>
         <p:nvSpPr>
@@ -15149,6 +19407,10 @@
           </a:solidFill>
           <a:ln/>
         </p:spPr>
+        <p:txBody>
+          <a:bodyPr/>
+          <a:p/>
+        </p:txBody>
       </p:sp>
       <p:pic>
         <p:nvPicPr>
@@ -15285,6 +19547,10 @@
             </a:outerShdw>
           </a:effectLst>
         </p:spPr>
+        <p:txBody>
+          <a:bodyPr/>
+          <a:p/>
+        </p:txBody>
       </p:sp>
       <p:sp>
         <p:nvSpPr>
@@ -15305,6 +19571,10 @@
           </a:solidFill>
           <a:ln/>
         </p:spPr>
+        <p:txBody>
+          <a:bodyPr/>
+          <a:p/>
+        </p:txBody>
       </p:sp>
       <p:sp>
         <p:nvSpPr>
@@ -15456,6 +19726,10 @@
             </a:outerShdw>
           </a:effectLst>
         </p:spPr>
+        <p:txBody>
+          <a:bodyPr/>
+          <a:p/>
+        </p:txBody>
       </p:sp>
       <p:sp>
         <p:nvSpPr>
@@ -15476,6 +19750,10 @@
           </a:solidFill>
           <a:ln/>
         </p:spPr>
+        <p:txBody>
+          <a:bodyPr/>
+          <a:p/>
+        </p:txBody>
       </p:sp>
       <p:sp>
         <p:nvSpPr>
@@ -15627,6 +19905,10 @@
             </a:outerShdw>
           </a:effectLst>
         </p:spPr>
+        <p:txBody>
+          <a:bodyPr/>
+          <a:p/>
+        </p:txBody>
       </p:sp>
       <p:sp>
         <p:nvSpPr>
@@ -15647,6 +19929,10 @@
           </a:solidFill>
           <a:ln/>
         </p:spPr>
+        <p:txBody>
+          <a:bodyPr/>
+          <a:p/>
+        </p:txBody>
       </p:sp>
       <p:sp>
         <p:nvSpPr>
@@ -15855,6 +20141,10 @@
           </a:solidFill>
           <a:ln/>
         </p:spPr>
+        <p:txBody>
+          <a:bodyPr/>
+          <a:p/>
+        </p:txBody>
       </p:sp>
       <p:pic>
         <p:nvPicPr>
@@ -15952,7 +20242,7 @@
                 <a:ea typeface="Calibri" pitchFamily="34" charset="-122"/>
                 <a:cs typeface="Calibri" pitchFamily="34" charset="-120"/>
               </a:rPr>
-              <a:t>For every question, the bot retrieves relevant chunks, feeds them as context to GPT with strict instructions to answer only from that context, and returns the answer with its sources.</a:t>
+              <a:t>For every question, the bot retrieves relevant chunks, feeds them as context to Claude with strict instructions to answer only from that context, and returns the answer with its sources.</a:t>
             </a:r>
             <a:endParaRPr lang="en-US" sz="1600" dirty="0"/>
           </a:p>
@@ -15991,6 +20281,10 @@
             </a:outerShdw>
           </a:effectLst>
         </p:spPr>
+        <p:txBody>
+          <a:bodyPr/>
+          <a:p/>
+        </p:txBody>
       </p:sp>
       <p:sp>
         <p:nvSpPr>
@@ -16054,6 +20348,10 @@
             <a:tailEnd type="triangle"/>
           </a:ln>
         </p:spPr>
+        <p:txBody>
+          <a:bodyPr/>
+          <a:p/>
+        </p:txBody>
       </p:sp>
       <p:sp>
         <p:nvSpPr>
@@ -16088,6 +20386,10 @@
             </a:outerShdw>
           </a:effectLst>
         </p:spPr>
+        <p:txBody>
+          <a:bodyPr/>
+          <a:p/>
+        </p:txBody>
       </p:sp>
       <p:sp>
         <p:nvSpPr>
@@ -16151,6 +20453,10 @@
             <a:tailEnd type="triangle"/>
           </a:ln>
         </p:spPr>
+        <p:txBody>
+          <a:bodyPr/>
+          <a:p/>
+        </p:txBody>
       </p:sp>
       <p:sp>
         <p:nvSpPr>
@@ -16185,6 +20491,10 @@
             </a:outerShdw>
           </a:effectLst>
         </p:spPr>
+        <p:txBody>
+          <a:bodyPr/>
+          <a:p/>
+        </p:txBody>
       </p:sp>
       <p:sp>
         <p:nvSpPr>
@@ -16248,6 +20558,10 @@
             <a:tailEnd type="triangle"/>
           </a:ln>
         </p:spPr>
+        <p:txBody>
+          <a:bodyPr/>
+          <a:p/>
+        </p:txBody>
       </p:sp>
       <p:sp>
         <p:nvSpPr>
@@ -16282,6 +20596,10 @@
             </a:outerShdw>
           </a:effectLst>
         </p:spPr>
+        <p:txBody>
+          <a:bodyPr/>
+          <a:p/>
+        </p:txBody>
       </p:sp>
       <p:sp>
         <p:nvSpPr>
@@ -16316,7 +20634,7 @@
                 <a:ea typeface="Calibri" pitchFamily="34" charset="-122"/>
                 <a:cs typeface="Calibri" pitchFamily="34" charset="-120"/>
               </a:rPr>
-              <a:t>GPT answers</a:t>
+              <a:t>Claude answers</a:t>
             </a:r>
             <a:endParaRPr lang="en-US" sz="1350" dirty="0"/>
           </a:p>
@@ -16345,6 +20663,10 @@
             <a:tailEnd type="triangle"/>
           </a:ln>
         </p:spPr>
+        <p:txBody>
+          <a:bodyPr/>
+          <a:p/>
+        </p:txBody>
       </p:sp>
       <p:sp>
         <p:nvSpPr>
@@ -16379,6 +20701,10 @@
             </a:outerShdw>
           </a:effectLst>
         </p:spPr>
+        <p:txBody>
+          <a:bodyPr/>
+          <a:p/>
+        </p:txBody>
       </p:sp>
       <p:sp>
         <p:nvSpPr>
@@ -16452,6 +20778,10 @@
             </a:outerShdw>
           </a:effectLst>
         </p:spPr>
+        <p:txBody>
+          <a:bodyPr/>
+          <a:p/>
+        </p:txBody>
       </p:sp>
       <p:pic>
         <p:nvPicPr>
